--- a/Project/RendezVousApp_Presentation_Stage.pptx
+++ b/Project/RendezVousApp_Presentation_Stage.pptx
@@ -315,7 +315,7 @@
           <a:p>
             <a:fld id="{5BCAD085-E8A6-8845-BD4E-CB4CCA059FC4}" type="datetimeFigureOut">
               <a:rPr lang="en-US" smtClean="0"/>
-              <a:t>5/29/2026</a:t>
+              <a:t>5/31/2026</a:t>
             </a:fld>
             <a:endParaRPr lang="en-US"/>
           </a:p>
@@ -483,7 +483,7 @@
           <a:p>
             <a:fld id="{5BCAD085-E8A6-8845-BD4E-CB4CCA059FC4}" type="datetimeFigureOut">
               <a:rPr lang="en-US" smtClean="0"/>
-              <a:t>5/29/2026</a:t>
+              <a:t>5/31/2026</a:t>
             </a:fld>
             <a:endParaRPr lang="en-US"/>
           </a:p>
@@ -661,7 +661,7 @@
           <a:p>
             <a:fld id="{5BCAD085-E8A6-8845-BD4E-CB4CCA059FC4}" type="datetimeFigureOut">
               <a:rPr lang="en-US" smtClean="0"/>
-              <a:t>5/29/2026</a:t>
+              <a:t>5/31/2026</a:t>
             </a:fld>
             <a:endParaRPr lang="en-US"/>
           </a:p>
@@ -829,7 +829,7 @@
           <a:p>
             <a:fld id="{5BCAD085-E8A6-8845-BD4E-CB4CCA059FC4}" type="datetimeFigureOut">
               <a:rPr lang="en-US" smtClean="0"/>
-              <a:t>5/29/2026</a:t>
+              <a:t>5/31/2026</a:t>
             </a:fld>
             <a:endParaRPr lang="en-US"/>
           </a:p>
@@ -1074,7 +1074,7 @@
           <a:p>
             <a:fld id="{5BCAD085-E8A6-8845-BD4E-CB4CCA059FC4}" type="datetimeFigureOut">
               <a:rPr lang="en-US" smtClean="0"/>
-              <a:t>5/29/2026</a:t>
+              <a:t>5/31/2026</a:t>
             </a:fld>
             <a:endParaRPr lang="en-US"/>
           </a:p>
@@ -1359,7 +1359,7 @@
           <a:p>
             <a:fld id="{5BCAD085-E8A6-8845-BD4E-CB4CCA059FC4}" type="datetimeFigureOut">
               <a:rPr lang="en-US" smtClean="0"/>
-              <a:t>5/29/2026</a:t>
+              <a:t>5/31/2026</a:t>
             </a:fld>
             <a:endParaRPr lang="en-US"/>
           </a:p>
@@ -1778,7 +1778,7 @@
           <a:p>
             <a:fld id="{5BCAD085-E8A6-8845-BD4E-CB4CCA059FC4}" type="datetimeFigureOut">
               <a:rPr lang="en-US" smtClean="0"/>
-              <a:t>5/29/2026</a:t>
+              <a:t>5/31/2026</a:t>
             </a:fld>
             <a:endParaRPr lang="en-US"/>
           </a:p>
@@ -1895,7 +1895,7 @@
           <a:p>
             <a:fld id="{5BCAD085-E8A6-8845-BD4E-CB4CCA059FC4}" type="datetimeFigureOut">
               <a:rPr lang="en-US" smtClean="0"/>
-              <a:t>5/29/2026</a:t>
+              <a:t>5/31/2026</a:t>
             </a:fld>
             <a:endParaRPr lang="en-US"/>
           </a:p>
@@ -1990,7 +1990,7 @@
           <a:p>
             <a:fld id="{5BCAD085-E8A6-8845-BD4E-CB4CCA059FC4}" type="datetimeFigureOut">
               <a:rPr lang="en-US" smtClean="0"/>
-              <a:t>5/29/2026</a:t>
+              <a:t>5/31/2026</a:t>
             </a:fld>
             <a:endParaRPr lang="en-US"/>
           </a:p>
@@ -2265,7 +2265,7 @@
           <a:p>
             <a:fld id="{5BCAD085-E8A6-8845-BD4E-CB4CCA059FC4}" type="datetimeFigureOut">
               <a:rPr lang="en-US" smtClean="0"/>
-              <a:t>5/29/2026</a:t>
+              <a:t>5/31/2026</a:t>
             </a:fld>
             <a:endParaRPr lang="en-US"/>
           </a:p>
@@ -2517,7 +2517,7 @@
           <a:p>
             <a:fld id="{5BCAD085-E8A6-8845-BD4E-CB4CCA059FC4}" type="datetimeFigureOut">
               <a:rPr lang="en-US" smtClean="0"/>
-              <a:t>5/29/2026</a:t>
+              <a:t>5/31/2026</a:t>
             </a:fld>
             <a:endParaRPr lang="en-US"/>
           </a:p>
@@ -2728,7 +2728,7 @@
           <a:p>
             <a:fld id="{5BCAD085-E8A6-8845-BD4E-CB4CCA059FC4}" type="datetimeFigureOut">
               <a:rPr lang="en-US" smtClean="0"/>
-              <a:t>5/29/2026</a:t>
+              <a:t>5/31/2026</a:t>
             </a:fld>
             <a:endParaRPr lang="en-US"/>
           </a:p>
@@ -10768,13 +10768,34 @@
           <a:p>
             <a:pPr algn="l"/>
             <a:r>
-              <a:rPr sz="1400" b="0" i="0">
+              <a:rPr sz="1400" b="0" i="0" dirty="0" err="1">
                 <a:solidFill>
                   <a:srgbClr val="FFFFFF"/>
                 </a:solidFill>
               </a:rPr>
-              <a:t>Contexte &amp; Objectifs</a:t>
-            </a:r>
+              <a:t>Contexte</a:t>
+            </a:r>
+            <a:r>
+              <a:rPr sz="1400" b="0" i="0" dirty="0">
+                <a:solidFill>
+                  <a:srgbClr val="FFFFFF"/>
+                </a:solidFill>
+              </a:rPr>
+              <a:t> &amp; </a:t>
+            </a:r>
+            <a:r>
+              <a:rPr sz="1400" b="0" i="0" dirty="0" err="1">
+                <a:solidFill>
+                  <a:srgbClr val="FFFFFF"/>
+                </a:solidFill>
+              </a:rPr>
+              <a:t>Objectifs</a:t>
+            </a:r>
+            <a:endParaRPr sz="1400" b="0" i="0" dirty="0">
+              <a:solidFill>
+                <a:srgbClr val="FFFFFF"/>
+              </a:solidFill>
+            </a:endParaRPr>
           </a:p>
         </p:txBody>
       </p:sp>
@@ -11168,7 +11189,7 @@
           <a:p>
             <a:pPr algn="l"/>
             <a:r>
-              <a:rPr sz="1400" b="0" i="0">
+              <a:rPr sz="1400" b="0" i="0" dirty="0">
                 <a:solidFill>
                   <a:srgbClr val="FFFFFF"/>
                 </a:solidFill>
@@ -11368,13 +11389,26 @@
           <a:p>
             <a:pPr algn="l"/>
             <a:r>
-              <a:rPr sz="1400" b="0" i="0">
+              <a:rPr sz="1400" b="0" i="0" dirty="0">
                 <a:solidFill>
                   <a:srgbClr val="FFFFFF"/>
                 </a:solidFill>
               </a:rPr>
-              <a:t>Stack Technologique</a:t>
-            </a:r>
+              <a:t>Stack </a:t>
+            </a:r>
+            <a:r>
+              <a:rPr sz="1400" b="0" i="0" dirty="0" err="1">
+                <a:solidFill>
+                  <a:srgbClr val="FFFFFF"/>
+                </a:solidFill>
+              </a:rPr>
+              <a:t>Technologique</a:t>
+            </a:r>
+            <a:endParaRPr sz="1400" b="0" i="0" dirty="0">
+              <a:solidFill>
+                <a:srgbClr val="FFFFFF"/>
+              </a:solidFill>
+            </a:endParaRPr>
           </a:p>
         </p:txBody>
       </p:sp>
@@ -11568,13 +11602,34 @@
           <a:p>
             <a:pPr algn="l"/>
             <a:r>
-              <a:rPr sz="1400" b="0" i="0">
+              <a:rPr sz="1400" b="0" i="0" dirty="0" err="1">
                 <a:solidFill>
                   <a:srgbClr val="FFFFFF"/>
                 </a:solidFill>
               </a:rPr>
-              <a:t>Fonctionnalités Clés</a:t>
-            </a:r>
+              <a:t>Fonctionnalités</a:t>
+            </a:r>
+            <a:r>
+              <a:rPr sz="1400" b="0" i="0" dirty="0">
+                <a:solidFill>
+                  <a:srgbClr val="FFFFFF"/>
+                </a:solidFill>
+              </a:rPr>
+              <a:t> </a:t>
+            </a:r>
+            <a:r>
+              <a:rPr sz="1400" b="0" i="0" dirty="0" err="1">
+                <a:solidFill>
+                  <a:srgbClr val="FFFFFF"/>
+                </a:solidFill>
+              </a:rPr>
+              <a:t>Clés</a:t>
+            </a:r>
+            <a:endParaRPr sz="1400" b="0" i="0" dirty="0">
+              <a:solidFill>
+                <a:srgbClr val="FFFFFF"/>
+              </a:solidFill>
+            </a:endParaRPr>
           </a:p>
         </p:txBody>
       </p:sp>
@@ -11768,7 +11823,7 @@
           <a:p>
             <a:pPr algn="l"/>
             <a:r>
-              <a:rPr sz="1400" b="0" i="0">
+              <a:rPr sz="1400" b="0" i="0" dirty="0">
                 <a:solidFill>
                   <a:srgbClr val="FFFFFF"/>
                 </a:solidFill>
@@ -12168,7 +12223,7 @@
           <a:p>
             <a:pPr algn="l"/>
             <a:r>
-              <a:rPr sz="1400" b="0" i="0">
+              <a:rPr sz="1400" b="0" i="0" dirty="0">
                 <a:solidFill>
                   <a:srgbClr val="FFFFFF"/>
                 </a:solidFill>
@@ -12368,13 +12423,26 @@
           <a:p>
             <a:pPr algn="l"/>
             <a:r>
-              <a:rPr sz="1400" b="0" i="0">
+              <a:rPr sz="1400" b="0" i="0" dirty="0">
                 <a:solidFill>
                   <a:srgbClr val="FFFFFF"/>
                 </a:solidFill>
               </a:rPr>
-              <a:t>Interface Utilisateur</a:t>
-            </a:r>
+              <a:t>Interface </a:t>
+            </a:r>
+            <a:r>
+              <a:rPr sz="1400" b="0" i="0" dirty="0" err="1">
+                <a:solidFill>
+                  <a:srgbClr val="FFFFFF"/>
+                </a:solidFill>
+              </a:rPr>
+              <a:t>Utilisateur</a:t>
+            </a:r>
+            <a:endParaRPr sz="1400" b="0" i="0" dirty="0">
+              <a:solidFill>
+                <a:srgbClr val="FFFFFF"/>
+              </a:solidFill>
+            </a:endParaRPr>
           </a:p>
         </p:txBody>
       </p:sp>
@@ -12568,7 +12636,7 @@
           <a:p>
             <a:pPr algn="l"/>
             <a:r>
-              <a:rPr sz="1400" b="0" i="0">
+              <a:rPr sz="1400" b="0" i="0" dirty="0">
                 <a:solidFill>
                   <a:srgbClr val="FFFFFF"/>
                 </a:solidFill>
@@ -15036,7 +15104,7 @@
         <p:spPr>
           <a:xfrm>
             <a:off x="457200" y="2788920"/>
-            <a:ext cx="3474720" cy="3657600"/>
+            <a:ext cx="3474720" cy="1649169"/>
           </a:xfrm>
           <a:prstGeom prst="rect">
             <a:avLst/>
@@ -15055,13 +15123,42 @@
               </a:spcBef>
             </a:pPr>
             <a:r>
-              <a:rPr sz="1200">
-                <a:solidFill>
-                  <a:srgbClr val="E0E0FF"/>
-                </a:solidFill>
-              </a:rPr>
-              <a:t>›  Inscription &amp; connexion sécurisée</a:t>
-            </a:r>
+              <a:rPr sz="1200" dirty="0">
+                <a:solidFill>
+                  <a:srgbClr val="E0E0FF"/>
+                </a:solidFill>
+              </a:rPr>
+              <a:t>›  Inscription &amp; </a:t>
+            </a:r>
+            <a:r>
+              <a:rPr sz="1200" dirty="0" err="1">
+                <a:solidFill>
+                  <a:srgbClr val="E0E0FF"/>
+                </a:solidFill>
+              </a:rPr>
+              <a:t>connexion</a:t>
+            </a:r>
+            <a:r>
+              <a:rPr sz="1200" dirty="0">
+                <a:solidFill>
+                  <a:srgbClr val="E0E0FF"/>
+                </a:solidFill>
+              </a:rPr>
+              <a:t> </a:t>
+            </a:r>
+            <a:r>
+              <a:rPr sz="1200" dirty="0" err="1">
+                <a:solidFill>
+                  <a:srgbClr val="E0E0FF"/>
+                </a:solidFill>
+              </a:rPr>
+              <a:t>sécurisée</a:t>
+            </a:r>
+            <a:endParaRPr sz="1200" dirty="0">
+              <a:solidFill>
+                <a:srgbClr val="E0E0FF"/>
+              </a:solidFill>
+            </a:endParaRPr>
           </a:p>
           <a:p>
             <a:pPr>
@@ -15070,13 +15167,26 @@
               </a:spcBef>
             </a:pPr>
             <a:r>
-              <a:rPr sz="1200">
-                <a:solidFill>
-                  <a:srgbClr val="E0E0FF"/>
-                </a:solidFill>
-              </a:rPr>
-              <a:t>›  Consulter les services disponibles</a:t>
-            </a:r>
+              <a:rPr sz="1200" dirty="0">
+                <a:solidFill>
+                  <a:srgbClr val="E0E0FF"/>
+                </a:solidFill>
+              </a:rPr>
+              <a:t>›  Consulter les services </a:t>
+            </a:r>
+            <a:r>
+              <a:rPr sz="1200" dirty="0" err="1">
+                <a:solidFill>
+                  <a:srgbClr val="E0E0FF"/>
+                </a:solidFill>
+              </a:rPr>
+              <a:t>disponibles</a:t>
+            </a:r>
+            <a:endParaRPr sz="1200" dirty="0">
+              <a:solidFill>
+                <a:srgbClr val="E0E0FF"/>
+              </a:solidFill>
+            </a:endParaRPr>
           </a:p>
           <a:p>
             <a:pPr>
@@ -15085,13 +15195,42 @@
               </a:spcBef>
             </a:pPr>
             <a:r>
-              <a:rPr sz="1200">
-                <a:solidFill>
-                  <a:srgbClr val="E0E0FF"/>
-                </a:solidFill>
-              </a:rPr>
-              <a:t>›  Prendre un RDV en ligne</a:t>
-            </a:r>
+              <a:rPr sz="1200" dirty="0">
+                <a:solidFill>
+                  <a:srgbClr val="E0E0FF"/>
+                </a:solidFill>
+              </a:rPr>
+              <a:t>›  Prendre un RDV </a:t>
+            </a:r>
+            <a:r>
+              <a:rPr sz="1200" dirty="0" err="1">
+                <a:solidFill>
+                  <a:srgbClr val="E0E0FF"/>
+                </a:solidFill>
+              </a:rPr>
+              <a:t>en</a:t>
+            </a:r>
+            <a:r>
+              <a:rPr sz="1200" dirty="0">
+                <a:solidFill>
+                  <a:srgbClr val="E0E0FF"/>
+                </a:solidFill>
+              </a:rPr>
+              <a:t> </a:t>
+            </a:r>
+            <a:r>
+              <a:rPr sz="1200" dirty="0" err="1">
+                <a:solidFill>
+                  <a:srgbClr val="E0E0FF"/>
+                </a:solidFill>
+              </a:rPr>
+              <a:t>ligne</a:t>
+            </a:r>
+            <a:endParaRPr sz="1200" dirty="0">
+              <a:solidFill>
+                <a:srgbClr val="E0E0FF"/>
+              </a:solidFill>
+            </a:endParaRPr>
           </a:p>
           <a:p>
             <a:pPr>
@@ -15100,12 +15239,108 @@
               </a:spcBef>
             </a:pPr>
             <a:r>
-              <a:rPr sz="1200">
-                <a:solidFill>
-                  <a:srgbClr val="E0E0FF"/>
-                </a:solidFill>
-              </a:rPr>
-              <a:t>›  Suivre le statut (en attente / confirmé / annulé)</a:t>
+              <a:rPr sz="1200" dirty="0">
+                <a:solidFill>
+                  <a:srgbClr val="E0E0FF"/>
+                </a:solidFill>
+              </a:rPr>
+              <a:t>›  </a:t>
+            </a:r>
+            <a:r>
+              <a:rPr sz="1200" dirty="0" err="1">
+                <a:solidFill>
+                  <a:srgbClr val="E0E0FF"/>
+                </a:solidFill>
+              </a:rPr>
+              <a:t>Suivre</a:t>
+            </a:r>
+            <a:r>
+              <a:rPr sz="1200" dirty="0">
+                <a:solidFill>
+                  <a:srgbClr val="E0E0FF"/>
+                </a:solidFill>
+              </a:rPr>
+              <a:t> le </a:t>
+            </a:r>
+            <a:r>
+              <a:rPr sz="1200" dirty="0" err="1">
+                <a:solidFill>
+                  <a:srgbClr val="E0E0FF"/>
+                </a:solidFill>
+              </a:rPr>
+              <a:t>statut</a:t>
+            </a:r>
+            <a:r>
+              <a:rPr sz="1200" dirty="0">
+                <a:solidFill>
+                  <a:srgbClr val="E0E0FF"/>
+                </a:solidFill>
+              </a:rPr>
+              <a:t> (</a:t>
+            </a:r>
+            <a:r>
+              <a:rPr sz="1200" dirty="0" err="1">
+                <a:solidFill>
+                  <a:srgbClr val="E0E0FF"/>
+                </a:solidFill>
+              </a:rPr>
+              <a:t>en</a:t>
+            </a:r>
+            <a:r>
+              <a:rPr sz="1200" dirty="0">
+                <a:solidFill>
+                  <a:srgbClr val="E0E0FF"/>
+                </a:solidFill>
+              </a:rPr>
+              <a:t> </a:t>
+            </a:r>
+            <a:r>
+              <a:rPr sz="1200" dirty="0" err="1">
+                <a:solidFill>
+                  <a:srgbClr val="E0E0FF"/>
+                </a:solidFill>
+              </a:rPr>
+              <a:t>attente</a:t>
+            </a:r>
+            <a:r>
+              <a:rPr sz="1200" dirty="0">
+                <a:solidFill>
+                  <a:srgbClr val="E0E0FF"/>
+                </a:solidFill>
+              </a:rPr>
+              <a:t> / </a:t>
+            </a:r>
+            <a:r>
+              <a:rPr sz="1200" dirty="0" err="1">
+                <a:solidFill>
+                  <a:srgbClr val="E0E0FF"/>
+                </a:solidFill>
+              </a:rPr>
+              <a:t>confirmé</a:t>
+            </a:r>
+            <a:r>
+              <a:rPr sz="1200" dirty="0">
+                <a:solidFill>
+                  <a:srgbClr val="E0E0FF"/>
+                </a:solidFill>
+              </a:rPr>
+              <a:t> / </a:t>
+            </a:r>
+            <a:r>
+              <a:rPr sz="1200" dirty="0" err="1">
+                <a:solidFill>
+                  <a:srgbClr val="E0E0FF"/>
+                </a:solidFill>
+              </a:rPr>
+              <a:t>annulé</a:t>
+            </a:r>
+            <a:r>
+              <a:rPr sz="1200" dirty="0">
+                <a:solidFill>
+                  <a:srgbClr val="E0E0FF"/>
+                </a:solidFill>
+              </a:rPr>
+              <a:t>)</a:t>
             </a:r>
           </a:p>
           <a:p>
@@ -15115,12 +15350,28 @@
               </a:spcBef>
             </a:pPr>
             <a:r>
-              <a:rPr sz="1200">
-                <a:solidFill>
-                  <a:srgbClr val="E0E0FF"/>
-                </a:solidFill>
-              </a:rPr>
-              <a:t>›  Annuler un RDV</a:t>
+              <a:rPr sz="1200" dirty="0">
+                <a:solidFill>
+                  <a:srgbClr val="E0E0FF"/>
+                </a:solidFill>
+              </a:rPr>
+              <a:t>›  </a:t>
+            </a:r>
+            <a:r>
+              <a:rPr sz="1200" dirty="0" err="1">
+                <a:solidFill>
+                  <a:srgbClr val="E0E0FF"/>
+                </a:solidFill>
+              </a:rPr>
+              <a:t>Annuler</a:t>
+            </a:r>
+            <a:r>
+              <a:rPr sz="1200" dirty="0">
+                <a:solidFill>
+                  <a:srgbClr val="E0E0FF"/>
+                </a:solidFill>
+              </a:rPr>
+              <a:t> un RDV</a:t>
             </a:r>
           </a:p>
           <a:p>
@@ -15130,13 +15381,26 @@
               </a:spcBef>
             </a:pPr>
             <a:r>
-              <a:rPr sz="1200">
-                <a:solidFill>
-                  <a:srgbClr val="E0E0FF"/>
-                </a:solidFill>
-              </a:rPr>
-              <a:t>›  Modifier son profil</a:t>
-            </a:r>
+              <a:rPr sz="1200" dirty="0">
+                <a:solidFill>
+                  <a:srgbClr val="E0E0FF"/>
+                </a:solidFill>
+              </a:rPr>
+              <a:t>›  Modifier son </a:t>
+            </a:r>
+            <a:r>
+              <a:rPr sz="1200" dirty="0" err="1">
+                <a:solidFill>
+                  <a:srgbClr val="E0E0FF"/>
+                </a:solidFill>
+              </a:rPr>
+              <a:t>profil</a:t>
+            </a:r>
+            <a:endParaRPr sz="1200" dirty="0">
+              <a:solidFill>
+                <a:srgbClr val="E0E0FF"/>
+              </a:solidFill>
+            </a:endParaRPr>
           </a:p>
         </p:txBody>
       </p:sp>
@@ -24855,12 +25119,100 @@
           <a:p>
             <a:pPr algn="l"/>
             <a:r>
-              <a:rPr sz="1150" b="0" i="0">
-                <a:solidFill>
-                  <a:srgbClr val="E0E0FF"/>
-                </a:solidFill>
-              </a:rPr>
-              <a:t>Authentification par token Bearer. Chaque token est lié à un utilisateur. Révocation propre à la déconnexion.</a:t>
+              <a:rPr sz="1150" b="0" i="0" dirty="0" err="1">
+                <a:solidFill>
+                  <a:srgbClr val="E0E0FF"/>
+                </a:solidFill>
+              </a:rPr>
+              <a:t>Authentification</a:t>
+            </a:r>
+            <a:r>
+              <a:rPr sz="1150" b="0" i="0" dirty="0">
+                <a:solidFill>
+                  <a:srgbClr val="E0E0FF"/>
+                </a:solidFill>
+              </a:rPr>
+              <a:t> par token Bearer. </a:t>
+            </a:r>
+            <a:r>
+              <a:rPr sz="1150" b="0" i="0" dirty="0" err="1">
+                <a:solidFill>
+                  <a:srgbClr val="E0E0FF"/>
+                </a:solidFill>
+              </a:rPr>
+              <a:t>Chaque</a:t>
+            </a:r>
+            <a:r>
+              <a:rPr sz="1150" b="0" i="0" dirty="0">
+                <a:solidFill>
+                  <a:srgbClr val="E0E0FF"/>
+                </a:solidFill>
+              </a:rPr>
+              <a:t> token est </a:t>
+            </a:r>
+            <a:r>
+              <a:rPr sz="1150" b="0" i="0" dirty="0" err="1">
+                <a:solidFill>
+                  <a:srgbClr val="E0E0FF"/>
+                </a:solidFill>
+              </a:rPr>
+              <a:t>lié</a:t>
+            </a:r>
+            <a:r>
+              <a:rPr sz="1150" b="0" i="0" dirty="0">
+                <a:solidFill>
+                  <a:srgbClr val="E0E0FF"/>
+                </a:solidFill>
+              </a:rPr>
+              <a:t> à un </a:t>
+            </a:r>
+            <a:r>
+              <a:rPr sz="1150" b="0" i="0" dirty="0" err="1">
+                <a:solidFill>
+                  <a:srgbClr val="E0E0FF"/>
+                </a:solidFill>
+              </a:rPr>
+              <a:t>utilisateur</a:t>
+            </a:r>
+            <a:r>
+              <a:rPr sz="1150" b="0" i="0" dirty="0">
+                <a:solidFill>
+                  <a:srgbClr val="E0E0FF"/>
+                </a:solidFill>
+              </a:rPr>
+              <a:t>. </a:t>
+            </a:r>
+            <a:r>
+              <a:rPr sz="1150" b="0" i="0" dirty="0" err="1">
+                <a:solidFill>
+                  <a:srgbClr val="E0E0FF"/>
+                </a:solidFill>
+              </a:rPr>
+              <a:t>Révocation</a:t>
+            </a:r>
+            <a:r>
+              <a:rPr sz="1150" b="0" i="0" dirty="0">
+                <a:solidFill>
+                  <a:srgbClr val="E0E0FF"/>
+                </a:solidFill>
+              </a:rPr>
+              <a:t> propre à la </a:t>
+            </a:r>
+            <a:r>
+              <a:rPr sz="1150" b="0" i="0" dirty="0" err="1">
+                <a:solidFill>
+                  <a:srgbClr val="E0E0FF"/>
+                </a:solidFill>
+              </a:rPr>
+              <a:t>déconnexion</a:t>
+            </a:r>
+            <a:r>
+              <a:rPr sz="1150" b="0" i="0" dirty="0">
+                <a:solidFill>
+                  <a:srgbClr val="E0E0FF"/>
+                </a:solidFill>
+              </a:rPr>
+              <a:t>.</a:t>
             </a:r>
           </a:p>
         </p:txBody>
@@ -25019,12 +25371,84 @@
           <a:p>
             <a:pPr algn="l"/>
             <a:r>
-              <a:rPr sz="1150" b="0" i="0">
-                <a:solidFill>
-                  <a:srgbClr val="E0E0FF"/>
-                </a:solidFill>
-              </a:rPr>
-              <a:t>Hashage des mots de passe avec 12 rounds. Aucun mot de passe jamais stocké en clair dans la base.</a:t>
+              <a:rPr sz="1150" b="0" i="0" dirty="0" err="1">
+                <a:solidFill>
+                  <a:srgbClr val="E0E0FF"/>
+                </a:solidFill>
+              </a:rPr>
+              <a:t>Hashage</a:t>
+            </a:r>
+            <a:r>
+              <a:rPr sz="1150" b="0" i="0" dirty="0">
+                <a:solidFill>
+                  <a:srgbClr val="E0E0FF"/>
+                </a:solidFill>
+              </a:rPr>
+              <a:t> des mots de passe avec 12 rounds. </a:t>
+            </a:r>
+            <a:r>
+              <a:rPr sz="1150" b="0" i="0" dirty="0" err="1">
+                <a:solidFill>
+                  <a:srgbClr val="E0E0FF"/>
+                </a:solidFill>
+              </a:rPr>
+              <a:t>Aucun</a:t>
+            </a:r>
+            <a:r>
+              <a:rPr sz="1150" b="0" i="0" dirty="0">
+                <a:solidFill>
+                  <a:srgbClr val="E0E0FF"/>
+                </a:solidFill>
+              </a:rPr>
+              <a:t> mot de passe jamais </a:t>
+            </a:r>
+            <a:r>
+              <a:rPr sz="1150" b="0" i="0" dirty="0" err="1">
+                <a:solidFill>
+                  <a:srgbClr val="E0E0FF"/>
+                </a:solidFill>
+              </a:rPr>
+              <a:t>stocké</a:t>
+            </a:r>
+            <a:r>
+              <a:rPr sz="1150" b="0" i="0" dirty="0">
+                <a:solidFill>
+                  <a:srgbClr val="E0E0FF"/>
+                </a:solidFill>
+              </a:rPr>
+              <a:t> </a:t>
+            </a:r>
+            <a:r>
+              <a:rPr sz="1150" b="0" i="0" dirty="0" err="1">
+                <a:solidFill>
+                  <a:srgbClr val="E0E0FF"/>
+                </a:solidFill>
+              </a:rPr>
+              <a:t>en</a:t>
+            </a:r>
+            <a:r>
+              <a:rPr sz="1150" b="0" i="0" dirty="0">
+                <a:solidFill>
+                  <a:srgbClr val="E0E0FF"/>
+                </a:solidFill>
+              </a:rPr>
+              <a:t> </a:t>
+            </a:r>
+            <a:r>
+              <a:rPr sz="1150" b="0" i="0" dirty="0" err="1">
+                <a:solidFill>
+                  <a:srgbClr val="E0E0FF"/>
+                </a:solidFill>
+              </a:rPr>
+              <a:t>clair</a:t>
+            </a:r>
+            <a:r>
+              <a:rPr sz="1150" b="0" i="0" dirty="0">
+                <a:solidFill>
+                  <a:srgbClr val="E0E0FF"/>
+                </a:solidFill>
+              </a:rPr>
+              <a:t> dans la base.</a:t>
             </a:r>
           </a:p>
         </p:txBody>

--- a/Project/RendezVousApp_Presentation_Stage.pptx
+++ b/Project/RendezVousApp_Presentation_Stage.pptx
@@ -16,9 +16,8 @@
     <p:sldId id="264" r:id="rId10"/>
     <p:sldId id="265" r:id="rId11"/>
     <p:sldId id="266" r:id="rId12"/>
-    <p:sldId id="267" r:id="rId13"/>
-    <p:sldId id="268" r:id="rId14"/>
-    <p:sldId id="269" r:id="rId15"/>
+    <p:sldId id="268" r:id="rId13"/>
+    <p:sldId id="269" r:id="rId14"/>
   </p:sldIdLst>
   <p:sldSz cx="12188825" cy="6858000"/>
   <p:notesSz cx="6858000" cy="9144000"/>
@@ -315,7 +314,7 @@
           <a:p>
             <a:fld id="{5BCAD085-E8A6-8845-BD4E-CB4CCA059FC4}" type="datetimeFigureOut">
               <a:rPr lang="en-US" smtClean="0"/>
-              <a:t>5/31/2026</a:t>
+              <a:t>6/1/2026</a:t>
             </a:fld>
             <a:endParaRPr lang="en-US"/>
           </a:p>
@@ -483,7 +482,7 @@
           <a:p>
             <a:fld id="{5BCAD085-E8A6-8845-BD4E-CB4CCA059FC4}" type="datetimeFigureOut">
               <a:rPr lang="en-US" smtClean="0"/>
-              <a:t>5/31/2026</a:t>
+              <a:t>6/1/2026</a:t>
             </a:fld>
             <a:endParaRPr lang="en-US"/>
           </a:p>
@@ -661,7 +660,7 @@
           <a:p>
             <a:fld id="{5BCAD085-E8A6-8845-BD4E-CB4CCA059FC4}" type="datetimeFigureOut">
               <a:rPr lang="en-US" smtClean="0"/>
-              <a:t>5/31/2026</a:t>
+              <a:t>6/1/2026</a:t>
             </a:fld>
             <a:endParaRPr lang="en-US"/>
           </a:p>
@@ -829,7 +828,7 @@
           <a:p>
             <a:fld id="{5BCAD085-E8A6-8845-BD4E-CB4CCA059FC4}" type="datetimeFigureOut">
               <a:rPr lang="en-US" smtClean="0"/>
-              <a:t>5/31/2026</a:t>
+              <a:t>6/1/2026</a:t>
             </a:fld>
             <a:endParaRPr lang="en-US"/>
           </a:p>
@@ -1074,7 +1073,7 @@
           <a:p>
             <a:fld id="{5BCAD085-E8A6-8845-BD4E-CB4CCA059FC4}" type="datetimeFigureOut">
               <a:rPr lang="en-US" smtClean="0"/>
-              <a:t>5/31/2026</a:t>
+              <a:t>6/1/2026</a:t>
             </a:fld>
             <a:endParaRPr lang="en-US"/>
           </a:p>
@@ -1359,7 +1358,7 @@
           <a:p>
             <a:fld id="{5BCAD085-E8A6-8845-BD4E-CB4CCA059FC4}" type="datetimeFigureOut">
               <a:rPr lang="en-US" smtClean="0"/>
-              <a:t>5/31/2026</a:t>
+              <a:t>6/1/2026</a:t>
             </a:fld>
             <a:endParaRPr lang="en-US"/>
           </a:p>
@@ -1778,7 +1777,7 @@
           <a:p>
             <a:fld id="{5BCAD085-E8A6-8845-BD4E-CB4CCA059FC4}" type="datetimeFigureOut">
               <a:rPr lang="en-US" smtClean="0"/>
-              <a:t>5/31/2026</a:t>
+              <a:t>6/1/2026</a:t>
             </a:fld>
             <a:endParaRPr lang="en-US"/>
           </a:p>
@@ -1895,7 +1894,7 @@
           <a:p>
             <a:fld id="{5BCAD085-E8A6-8845-BD4E-CB4CCA059FC4}" type="datetimeFigureOut">
               <a:rPr lang="en-US" smtClean="0"/>
-              <a:t>5/31/2026</a:t>
+              <a:t>6/1/2026</a:t>
             </a:fld>
             <a:endParaRPr lang="en-US"/>
           </a:p>
@@ -1990,7 +1989,7 @@
           <a:p>
             <a:fld id="{5BCAD085-E8A6-8845-BD4E-CB4CCA059FC4}" type="datetimeFigureOut">
               <a:rPr lang="en-US" smtClean="0"/>
-              <a:t>5/31/2026</a:t>
+              <a:t>6/1/2026</a:t>
             </a:fld>
             <a:endParaRPr lang="en-US"/>
           </a:p>
@@ -2265,7 +2264,7 @@
           <a:p>
             <a:fld id="{5BCAD085-E8A6-8845-BD4E-CB4CCA059FC4}" type="datetimeFigureOut">
               <a:rPr lang="en-US" smtClean="0"/>
-              <a:t>5/31/2026</a:t>
+              <a:t>6/1/2026</a:t>
             </a:fld>
             <a:endParaRPr lang="en-US"/>
           </a:p>
@@ -2517,7 +2516,7 @@
           <a:p>
             <a:fld id="{5BCAD085-E8A6-8845-BD4E-CB4CCA059FC4}" type="datetimeFigureOut">
               <a:rPr lang="en-US" smtClean="0"/>
-              <a:t>5/31/2026</a:t>
+              <a:t>6/1/2026</a:t>
             </a:fld>
             <a:endParaRPr lang="en-US"/>
           </a:p>
@@ -2728,7 +2727,7 @@
           <a:p>
             <a:fld id="{5BCAD085-E8A6-8845-BD4E-CB4CCA059FC4}" type="datetimeFigureOut">
               <a:rPr lang="en-US" smtClean="0"/>
-              <a:t>5/31/2026</a:t>
+              <a:t>6/1/2026</a:t>
             </a:fld>
             <a:endParaRPr lang="en-US"/>
           </a:p>
@@ -6549,7 +6548,7 @@
             <a:avLst/>
           </a:prstGeom>
           <a:solidFill>
-            <a:srgbClr val="FF8C00"/>
+            <a:srgbClr val="F3C623"/>
           </a:solidFill>
           <a:ln>
             <a:noFill/>
@@ -6607,7 +6606,7 @@
                   <a:srgbClr val="FFFFFF"/>
                 </a:solidFill>
               </a:rPr>
-              <a:t>Défis &amp; Solutions</a:t>
+              <a:t>Conclusion &amp; Perspectives</a:t>
             </a:r>
           </a:p>
         </p:txBody>
@@ -6641,7 +6640,7 @@
                   <a:srgbClr val="A0A0C0"/>
                 </a:solidFill>
               </a:rPr>
-              <a:t>Problèmes rencontrés et comment ils ont été résolus</a:t>
+              <a:t>Ce que ce stage m'a apporté — et ce qui reste à faire</a:t>
             </a:r>
           </a:p>
         </p:txBody>
@@ -6661,7 +6660,7 @@
             <a:avLst/>
           </a:prstGeom>
           <a:solidFill>
-            <a:srgbClr val="FF8C00"/>
+            <a:srgbClr val="F3C623"/>
           </a:solidFill>
           <a:ln>
             <a:noFill/>
@@ -6821,7 +6820,7 @@
         <p:spPr>
           <a:xfrm>
             <a:off x="274320" y="1463040"/>
-            <a:ext cx="5715000" cy="2331720"/>
+            <a:ext cx="5486400" cy="5074920"/>
           </a:xfrm>
           <a:prstGeom prst="rect">
             <a:avLst/>
@@ -6865,13 +6864,13 @@
         <p:spPr>
           <a:xfrm>
             <a:off x="274320" y="1463040"/>
-            <a:ext cx="5715000" cy="73152"/>
-          </a:xfrm>
-          <a:prstGeom prst="rect">
-            <a:avLst/>
-          </a:prstGeom>
-          <a:solidFill>
-            <a:srgbClr val="9B59B6"/>
+            <a:ext cx="5486400" cy="73152"/>
+          </a:xfrm>
+          <a:prstGeom prst="rect">
+            <a:avLst/>
+          </a:prstGeom>
+          <a:solidFill>
+            <a:srgbClr val="00E576"/>
           </a:solidFill>
           <a:ln>
             <a:noFill/>
@@ -6909,7 +6908,7 @@
         <p:spPr>
           <a:xfrm>
             <a:off x="274320" y="1463040"/>
-            <a:ext cx="5715000" cy="594360"/>
+            <a:ext cx="5486400" cy="594360"/>
           </a:xfrm>
           <a:prstGeom prst="rect">
             <a:avLst/>
@@ -6952,8 +6951,8 @@
         </p:nvSpPr>
         <p:spPr>
           <a:xfrm>
-            <a:off x="411479" y="1554480"/>
-            <a:ext cx="5394960" cy="307777"/>
+            <a:off x="411480" y="1536192"/>
+            <a:ext cx="5212080" cy="307777"/>
           </a:xfrm>
           <a:prstGeom prst="rect">
             <a:avLst/>
@@ -6970,89 +6969,24 @@
             <a:r>
               <a:rPr sz="1400" b="1" i="0" dirty="0">
                 <a:solidFill>
-                  <a:srgbClr val="9B59B6"/>
-                </a:solidFill>
-              </a:rPr>
-              <a:t>  Gestion Multi-</a:t>
-            </a:r>
-            <a:r>
-              <a:rPr sz="1400" b="1" i="0" dirty="0" err="1">
-                <a:solidFill>
-                  <a:srgbClr val="9B59B6"/>
-                </a:solidFill>
-              </a:rPr>
-              <a:t>Rôle</a:t>
-            </a:r>
-            <a:r>
-              <a:rPr lang="en-US" sz="1400" b="1" i="0" dirty="0" err="1">
-                <a:solidFill>
-                  <a:srgbClr val="9B59B6"/>
-                </a:solidFill>
-              </a:rPr>
-              <a:t>s</a:t>
-            </a:r>
-            <a:endParaRPr sz="1400" b="1" i="0" dirty="0">
-              <a:solidFill>
-                <a:srgbClr val="9B59B6"/>
-              </a:solidFill>
-            </a:endParaRPr>
-          </a:p>
-        </p:txBody>
-      </p:sp>
-      <p:sp>
-        <p:nvSpPr>
-          <p:cNvPr id="14" name="Rectangle 13"/>
-          <p:cNvSpPr/>
-          <p:nvPr/>
-        </p:nvSpPr>
-        <p:spPr>
-          <a:xfrm>
-            <a:off x="411479" y="2176272"/>
-            <a:ext cx="73152" cy="502920"/>
-          </a:xfrm>
-          <a:prstGeom prst="rect">
-            <a:avLst/>
-          </a:prstGeom>
-          <a:solidFill>
-            <a:srgbClr val="FF6384"/>
-          </a:solidFill>
-          <a:ln>
-            <a:noFill/>
-          </a:ln>
-        </p:spPr>
-        <p:style>
-          <a:lnRef idx="1">
-            <a:schemeClr val="accent1"/>
-          </a:lnRef>
-          <a:fillRef idx="3">
-            <a:schemeClr val="accent1"/>
-          </a:fillRef>
-          <a:effectRef idx="2">
-            <a:schemeClr val="accent1"/>
-          </a:effectRef>
-          <a:fontRef idx="minor">
-            <a:schemeClr val="lt1"/>
-          </a:fontRef>
-        </p:style>
-        <p:txBody>
-          <a:bodyPr rtlCol="0" anchor="ctr"/>
-          <a:lstStyle/>
-          <a:p>
-            <a:pPr algn="ctr"/>
-            <a:endParaRPr/>
-          </a:p>
-        </p:txBody>
-      </p:sp>
-      <p:sp>
-        <p:nvSpPr>
-          <p:cNvPr id="15" name="TextBox 14"/>
+                  <a:srgbClr val="00E576"/>
+                </a:solidFill>
+              </a:rPr>
+              <a:t>  Bilan du Stage</a:t>
+            </a:r>
+          </a:p>
+        </p:txBody>
+      </p:sp>
+      <p:sp>
+        <p:nvSpPr>
+          <p:cNvPr id="14" name="TextBox 13"/>
           <p:cNvSpPr txBox="1"/>
           <p:nvPr/>
         </p:nvSpPr>
         <p:spPr>
           <a:xfrm>
-            <a:off x="594359" y="2148840"/>
-            <a:ext cx="5212080" cy="548640"/>
+            <a:off x="411480" y="2148840"/>
+            <a:ext cx="5212080" cy="4206240"/>
           </a:xfrm>
           <a:prstGeom prst="rect">
             <a:avLst/>
@@ -7065,15 +6999,441 @@
           </a:bodyPr>
           <a:lstStyle/>
           <a:p>
-            <a:pPr algn="l"/>
-            <a:r>
-              <a:rPr sz="1150" b="0" i="1">
-                <a:solidFill>
-                  <a:srgbClr val="A0A0C0"/>
-                </a:solidFill>
-              </a:rPr>
-              <a:t>Défi  ›  Accès strictement séparés côté frontend ET backend.</a:t>
-            </a:r>
+            <a:pPr>
+              <a:spcBef>
+                <a:spcPts val="800"/>
+              </a:spcBef>
+            </a:pPr>
+            <a:r>
+              <a:rPr sz="1250" dirty="0">
+                <a:solidFill>
+                  <a:srgbClr val="E0E0FF"/>
+                </a:solidFill>
+              </a:rPr>
+              <a:t>✔  Application web full-stack </a:t>
+            </a:r>
+            <a:r>
+              <a:rPr sz="1250" dirty="0" err="1">
+                <a:solidFill>
+                  <a:srgbClr val="E0E0FF"/>
+                </a:solidFill>
+              </a:rPr>
+              <a:t>fonctionnelle</a:t>
+            </a:r>
+            <a:r>
+              <a:rPr sz="1250" dirty="0">
+                <a:solidFill>
+                  <a:srgbClr val="E0E0FF"/>
+                </a:solidFill>
+              </a:rPr>
+              <a:t> de A à Z</a:t>
+            </a:r>
+          </a:p>
+          <a:p>
+            <a:pPr>
+              <a:spcBef>
+                <a:spcPts val="800"/>
+              </a:spcBef>
+            </a:pPr>
+            <a:r>
+              <a:rPr sz="1250" dirty="0">
+                <a:solidFill>
+                  <a:srgbClr val="E0E0FF"/>
+                </a:solidFill>
+              </a:rPr>
+              <a:t>✔  Système multi-</a:t>
+            </a:r>
+            <a:r>
+              <a:rPr sz="1250" dirty="0" err="1">
+                <a:solidFill>
+                  <a:srgbClr val="E0E0FF"/>
+                </a:solidFill>
+              </a:rPr>
+              <a:t>rôle</a:t>
+            </a:r>
+            <a:r>
+              <a:rPr sz="1250" dirty="0">
+                <a:solidFill>
+                  <a:srgbClr val="E0E0FF"/>
+                </a:solidFill>
+              </a:rPr>
+              <a:t> </a:t>
+            </a:r>
+            <a:r>
+              <a:rPr sz="1250" dirty="0" err="1">
+                <a:solidFill>
+                  <a:srgbClr val="E0E0FF"/>
+                </a:solidFill>
+              </a:rPr>
+              <a:t>complet</a:t>
+            </a:r>
+            <a:r>
+              <a:rPr sz="1250" dirty="0">
+                <a:solidFill>
+                  <a:srgbClr val="E0E0FF"/>
+                </a:solidFill>
+              </a:rPr>
+              <a:t> et </a:t>
+            </a:r>
+            <a:r>
+              <a:rPr sz="1250" dirty="0" err="1">
+                <a:solidFill>
+                  <a:srgbClr val="E0E0FF"/>
+                </a:solidFill>
+              </a:rPr>
+              <a:t>sécurisé</a:t>
+            </a:r>
+            <a:endParaRPr sz="1250" dirty="0">
+              <a:solidFill>
+                <a:srgbClr val="E0E0FF"/>
+              </a:solidFill>
+            </a:endParaRPr>
+          </a:p>
+          <a:p>
+            <a:pPr>
+              <a:spcBef>
+                <a:spcPts val="800"/>
+              </a:spcBef>
+            </a:pPr>
+            <a:r>
+              <a:rPr sz="1250" dirty="0">
+                <a:solidFill>
+                  <a:srgbClr val="E0E0FF"/>
+                </a:solidFill>
+              </a:rPr>
+              <a:t>✔  API RESTful avec 50+ endpoints </a:t>
+            </a:r>
+            <a:r>
+              <a:rPr sz="1250" dirty="0" err="1">
+                <a:solidFill>
+                  <a:srgbClr val="E0E0FF"/>
+                </a:solidFill>
+              </a:rPr>
+              <a:t>documentés</a:t>
+            </a:r>
+            <a:endParaRPr sz="1250" dirty="0">
+              <a:solidFill>
+                <a:srgbClr val="E0E0FF"/>
+              </a:solidFill>
+            </a:endParaRPr>
+          </a:p>
+          <a:p>
+            <a:pPr>
+              <a:spcBef>
+                <a:spcPts val="800"/>
+              </a:spcBef>
+            </a:pPr>
+            <a:r>
+              <a:rPr sz="1250" dirty="0">
+                <a:solidFill>
+                  <a:srgbClr val="E0E0FF"/>
+                </a:solidFill>
+              </a:rPr>
+              <a:t>✔  Interface React </a:t>
+            </a:r>
+            <a:r>
+              <a:rPr sz="1250" dirty="0" err="1">
+                <a:solidFill>
+                  <a:srgbClr val="E0E0FF"/>
+                </a:solidFill>
+              </a:rPr>
+              <a:t>moderne</a:t>
+            </a:r>
+            <a:r>
+              <a:rPr sz="1250" dirty="0">
+                <a:solidFill>
+                  <a:srgbClr val="E0E0FF"/>
+                </a:solidFill>
+              </a:rPr>
+              <a:t> et </a:t>
+            </a:r>
+            <a:r>
+              <a:rPr sz="1250" dirty="0" err="1">
+                <a:solidFill>
+                  <a:srgbClr val="E0E0FF"/>
+                </a:solidFill>
+              </a:rPr>
+              <a:t>réactive</a:t>
+            </a:r>
+            <a:endParaRPr sz="1250" dirty="0">
+              <a:solidFill>
+                <a:srgbClr val="E0E0FF"/>
+              </a:solidFill>
+            </a:endParaRPr>
+          </a:p>
+          <a:p>
+            <a:pPr>
+              <a:spcBef>
+                <a:spcPts val="800"/>
+              </a:spcBef>
+            </a:pPr>
+            <a:r>
+              <a:rPr sz="1250" dirty="0">
+                <a:solidFill>
+                  <a:srgbClr val="E0E0FF"/>
+                </a:solidFill>
+              </a:rPr>
+              <a:t>✔  </a:t>
+            </a:r>
+            <a:r>
+              <a:rPr sz="1250" dirty="0" err="1">
+                <a:solidFill>
+                  <a:srgbClr val="E0E0FF"/>
+                </a:solidFill>
+              </a:rPr>
+              <a:t>Authentification</a:t>
+            </a:r>
+            <a:r>
+              <a:rPr sz="1250" dirty="0">
+                <a:solidFill>
+                  <a:srgbClr val="E0E0FF"/>
+                </a:solidFill>
+              </a:rPr>
+              <a:t> </a:t>
+            </a:r>
+            <a:r>
+              <a:rPr sz="1250" dirty="0" err="1">
+                <a:solidFill>
+                  <a:srgbClr val="E0E0FF"/>
+                </a:solidFill>
+              </a:rPr>
+              <a:t>robuste</a:t>
+            </a:r>
+            <a:r>
+              <a:rPr sz="1250" dirty="0">
+                <a:solidFill>
+                  <a:srgbClr val="E0E0FF"/>
+                </a:solidFill>
+              </a:rPr>
+              <a:t> (Sanctum + </a:t>
+            </a:r>
+            <a:r>
+              <a:rPr sz="1250" dirty="0" err="1">
+                <a:solidFill>
+                  <a:srgbClr val="E0E0FF"/>
+                </a:solidFill>
+              </a:rPr>
+              <a:t>bcrypt</a:t>
+            </a:r>
+            <a:r>
+              <a:rPr sz="1250" dirty="0">
+                <a:solidFill>
+                  <a:srgbClr val="E0E0FF"/>
+                </a:solidFill>
+              </a:rPr>
+              <a:t>)</a:t>
+            </a:r>
+          </a:p>
+          <a:p>
+            <a:pPr>
+              <a:spcBef>
+                <a:spcPts val="800"/>
+              </a:spcBef>
+            </a:pPr>
+            <a:r>
+              <a:rPr sz="1250" dirty="0">
+                <a:solidFill>
+                  <a:srgbClr val="E0E0FF"/>
+                </a:solidFill>
+              </a:rPr>
+              <a:t>✔  </a:t>
+            </a:r>
+            <a:r>
+              <a:rPr sz="1250" dirty="0" err="1">
+                <a:solidFill>
+                  <a:srgbClr val="E0E0FF"/>
+                </a:solidFill>
+              </a:rPr>
+              <a:t>Calendrier</a:t>
+            </a:r>
+            <a:r>
+              <a:rPr sz="1250" dirty="0">
+                <a:solidFill>
+                  <a:srgbClr val="E0E0FF"/>
+                </a:solidFill>
+              </a:rPr>
+              <a:t> </a:t>
+            </a:r>
+            <a:r>
+              <a:rPr sz="1250" dirty="0" err="1">
+                <a:solidFill>
+                  <a:srgbClr val="E0E0FF"/>
+                </a:solidFill>
+              </a:rPr>
+              <a:t>médical</a:t>
+            </a:r>
+            <a:r>
+              <a:rPr sz="1250" dirty="0">
+                <a:solidFill>
+                  <a:srgbClr val="E0E0FF"/>
+                </a:solidFill>
+              </a:rPr>
+              <a:t> </a:t>
+            </a:r>
+            <a:r>
+              <a:rPr sz="1250" dirty="0" err="1">
+                <a:solidFill>
+                  <a:srgbClr val="E0E0FF"/>
+                </a:solidFill>
+              </a:rPr>
+              <a:t>interactif</a:t>
+            </a:r>
+            <a:r>
+              <a:rPr sz="1250" dirty="0">
+                <a:solidFill>
+                  <a:srgbClr val="E0E0FF"/>
+                </a:solidFill>
+              </a:rPr>
+              <a:t> (</a:t>
+            </a:r>
+            <a:r>
+              <a:rPr sz="1250" dirty="0" err="1">
+                <a:solidFill>
+                  <a:srgbClr val="E0E0FF"/>
+                </a:solidFill>
+              </a:rPr>
+              <a:t>FullCalendar</a:t>
+            </a:r>
+            <a:r>
+              <a:rPr sz="1250" dirty="0">
+                <a:solidFill>
+                  <a:srgbClr val="E0E0FF"/>
+                </a:solidFill>
+              </a:rPr>
+              <a:t>)</a:t>
+            </a:r>
+          </a:p>
+          <a:p>
+            <a:pPr>
+              <a:spcBef>
+                <a:spcPts val="800"/>
+              </a:spcBef>
+            </a:pPr>
+            <a:r>
+              <a:rPr sz="1250" dirty="0">
+                <a:solidFill>
+                  <a:srgbClr val="E0E0FF"/>
+                </a:solidFill>
+              </a:rPr>
+              <a:t>✔  </a:t>
+            </a:r>
+            <a:r>
+              <a:rPr sz="1250" dirty="0" err="1">
+                <a:solidFill>
+                  <a:srgbClr val="E0E0FF"/>
+                </a:solidFill>
+              </a:rPr>
+              <a:t>Maîtrise</a:t>
+            </a:r>
+            <a:r>
+              <a:rPr sz="1250" dirty="0">
+                <a:solidFill>
+                  <a:srgbClr val="E0E0FF"/>
+                </a:solidFill>
+              </a:rPr>
+              <a:t> : React, Redux, Laravel, </a:t>
+            </a:r>
+            <a:r>
+              <a:rPr sz="1250" dirty="0" err="1">
+                <a:solidFill>
+                  <a:srgbClr val="E0E0FF"/>
+                </a:solidFill>
+              </a:rPr>
+              <a:t>TailwindCSS</a:t>
+            </a:r>
+            <a:endParaRPr sz="1250" dirty="0">
+              <a:solidFill>
+                <a:srgbClr val="E0E0FF"/>
+              </a:solidFill>
+            </a:endParaRPr>
+          </a:p>
+          <a:p>
+            <a:pPr>
+              <a:spcBef>
+                <a:spcPts val="800"/>
+              </a:spcBef>
+            </a:pPr>
+            <a:r>
+              <a:rPr sz="1250" dirty="0">
+                <a:solidFill>
+                  <a:srgbClr val="E0E0FF"/>
+                </a:solidFill>
+              </a:rPr>
+              <a:t>✔  Architecture Client-</a:t>
+            </a:r>
+            <a:r>
+              <a:rPr sz="1250" dirty="0" err="1">
+                <a:solidFill>
+                  <a:srgbClr val="E0E0FF"/>
+                </a:solidFill>
+              </a:rPr>
+              <a:t>Serveur</a:t>
+            </a:r>
+            <a:r>
+              <a:rPr sz="1250" dirty="0">
+                <a:solidFill>
+                  <a:srgbClr val="E0E0FF"/>
+                </a:solidFill>
+              </a:rPr>
+              <a:t> </a:t>
+            </a:r>
+            <a:r>
+              <a:rPr sz="1250" dirty="0" err="1">
+                <a:solidFill>
+                  <a:srgbClr val="E0E0FF"/>
+                </a:solidFill>
+              </a:rPr>
+              <a:t>professionnelle</a:t>
+            </a:r>
+            <a:endParaRPr sz="1250" dirty="0">
+              <a:solidFill>
+                <a:srgbClr val="E0E0FF"/>
+              </a:solidFill>
+            </a:endParaRPr>
+          </a:p>
+        </p:txBody>
+      </p:sp>
+      <p:sp>
+        <p:nvSpPr>
+          <p:cNvPr id="15" name="Rectangle 14"/>
+          <p:cNvSpPr/>
+          <p:nvPr/>
+        </p:nvSpPr>
+        <p:spPr>
+          <a:xfrm>
+            <a:off x="6309360" y="1463040"/>
+            <a:ext cx="5577840" cy="5074920"/>
+          </a:xfrm>
+          <a:prstGeom prst="rect">
+            <a:avLst/>
+          </a:prstGeom>
+          <a:solidFill>
+            <a:srgbClr val="16213E"/>
+          </a:solidFill>
+          <a:ln>
+            <a:noFill/>
+          </a:ln>
+        </p:spPr>
+        <p:style>
+          <a:lnRef idx="1">
+            <a:schemeClr val="accent1"/>
+          </a:lnRef>
+          <a:fillRef idx="3">
+            <a:schemeClr val="accent1"/>
+          </a:fillRef>
+          <a:effectRef idx="2">
+            <a:schemeClr val="accent1"/>
+          </a:effectRef>
+          <a:fontRef idx="minor">
+            <a:schemeClr val="lt1"/>
+          </a:fontRef>
+        </p:style>
+        <p:txBody>
+          <a:bodyPr rtlCol="0" anchor="ctr"/>
+          <a:lstStyle/>
+          <a:p>
+            <a:pPr algn="ctr"/>
+            <a:endParaRPr/>
           </a:p>
         </p:txBody>
       </p:sp>
@@ -7085,52 +7445,96 @@
         </p:nvSpPr>
         <p:spPr>
           <a:xfrm>
-            <a:off x="411479" y="2761488"/>
-            <a:ext cx="73152" cy="685800"/>
-          </a:xfrm>
-          <a:prstGeom prst="rect">
-            <a:avLst/>
-          </a:prstGeom>
-          <a:solidFill>
-            <a:srgbClr val="00E576"/>
-          </a:solidFill>
-          <a:ln>
-            <a:noFill/>
-          </a:ln>
-        </p:spPr>
-        <p:style>
-          <a:lnRef idx="1">
-            <a:schemeClr val="accent1"/>
-          </a:lnRef>
-          <a:fillRef idx="3">
-            <a:schemeClr val="accent1"/>
-          </a:fillRef>
-          <a:effectRef idx="2">
-            <a:schemeClr val="accent1"/>
-          </a:effectRef>
-          <a:fontRef idx="minor">
-            <a:schemeClr val="lt1"/>
-          </a:fontRef>
-        </p:style>
-        <p:txBody>
-          <a:bodyPr rtlCol="0" anchor="ctr"/>
-          <a:lstStyle/>
-          <a:p>
-            <a:pPr algn="ctr"/>
-            <a:endParaRPr/>
-          </a:p>
-        </p:txBody>
-      </p:sp>
-      <p:sp>
-        <p:nvSpPr>
-          <p:cNvPr id="17" name="TextBox 16"/>
+            <a:off x="6309360" y="1463040"/>
+            <a:ext cx="5577840" cy="73152"/>
+          </a:xfrm>
+          <a:prstGeom prst="rect">
+            <a:avLst/>
+          </a:prstGeom>
+          <a:solidFill>
+            <a:srgbClr val="BB86FC"/>
+          </a:solidFill>
+          <a:ln>
+            <a:noFill/>
+          </a:ln>
+        </p:spPr>
+        <p:style>
+          <a:lnRef idx="1">
+            <a:schemeClr val="accent1"/>
+          </a:lnRef>
+          <a:fillRef idx="3">
+            <a:schemeClr val="accent1"/>
+          </a:fillRef>
+          <a:effectRef idx="2">
+            <a:schemeClr val="accent1"/>
+          </a:effectRef>
+          <a:fontRef idx="minor">
+            <a:schemeClr val="lt1"/>
+          </a:fontRef>
+        </p:style>
+        <p:txBody>
+          <a:bodyPr rtlCol="0" anchor="ctr"/>
+          <a:lstStyle/>
+          <a:p>
+            <a:pPr algn="ctr"/>
+            <a:endParaRPr/>
+          </a:p>
+        </p:txBody>
+      </p:sp>
+      <p:sp>
+        <p:nvSpPr>
+          <p:cNvPr id="17" name="Rectangle 16"/>
+          <p:cNvSpPr/>
+          <p:nvPr/>
+        </p:nvSpPr>
+        <p:spPr>
+          <a:xfrm>
+            <a:off x="6309360" y="1463040"/>
+            <a:ext cx="5577840" cy="594360"/>
+          </a:xfrm>
+          <a:prstGeom prst="rect">
+            <a:avLst/>
+          </a:prstGeom>
+          <a:solidFill>
+            <a:srgbClr val="1A1A2E"/>
+          </a:solidFill>
+          <a:ln>
+            <a:noFill/>
+          </a:ln>
+        </p:spPr>
+        <p:style>
+          <a:lnRef idx="1">
+            <a:schemeClr val="accent1"/>
+          </a:lnRef>
+          <a:fillRef idx="3">
+            <a:schemeClr val="accent1"/>
+          </a:fillRef>
+          <a:effectRef idx="2">
+            <a:schemeClr val="accent1"/>
+          </a:effectRef>
+          <a:fontRef idx="minor">
+            <a:schemeClr val="lt1"/>
+          </a:fontRef>
+        </p:style>
+        <p:txBody>
+          <a:bodyPr rtlCol="0" anchor="ctr"/>
+          <a:lstStyle/>
+          <a:p>
+            <a:pPr algn="ctr"/>
+            <a:endParaRPr/>
+          </a:p>
+        </p:txBody>
+      </p:sp>
+      <p:sp>
+        <p:nvSpPr>
+          <p:cNvPr id="18" name="TextBox 17"/>
           <p:cNvSpPr txBox="1"/>
           <p:nvPr/>
         </p:nvSpPr>
         <p:spPr>
           <a:xfrm>
-            <a:off x="594359" y="2743200"/>
-            <a:ext cx="5212080" cy="777240"/>
+            <a:off x="6446520" y="1536192"/>
+            <a:ext cx="5303520" cy="307777"/>
           </a:xfrm>
           <a:prstGeom prst="rect">
             <a:avLst/>
@@ -7145,158 +7549,47 @@
           <a:p>
             <a:pPr algn="l"/>
             <a:r>
-              <a:rPr sz="1150" b="1" i="0">
-                <a:solidFill>
-                  <a:srgbClr val="E0E0FF"/>
-                </a:solidFill>
-              </a:rPr>
-              <a:t>Solution  ›  RBAC via middleware Laravel + ProtectedRoutes React.</a:t>
-            </a:r>
-          </a:p>
-        </p:txBody>
-      </p:sp>
-      <p:sp>
-        <p:nvSpPr>
-          <p:cNvPr id="18" name="Rectangle 17"/>
-          <p:cNvSpPr/>
-          <p:nvPr/>
-        </p:nvSpPr>
-        <p:spPr>
-          <a:xfrm>
-            <a:off x="6309359" y="1463040"/>
-            <a:ext cx="5715000" cy="2331720"/>
-          </a:xfrm>
-          <a:prstGeom prst="rect">
-            <a:avLst/>
-          </a:prstGeom>
-          <a:solidFill>
-            <a:srgbClr val="16213E"/>
-          </a:solidFill>
-          <a:ln>
-            <a:noFill/>
-          </a:ln>
-        </p:spPr>
-        <p:style>
-          <a:lnRef idx="1">
-            <a:schemeClr val="accent1"/>
-          </a:lnRef>
-          <a:fillRef idx="3">
-            <a:schemeClr val="accent1"/>
-          </a:fillRef>
-          <a:effectRef idx="2">
-            <a:schemeClr val="accent1"/>
-          </a:effectRef>
-          <a:fontRef idx="minor">
-            <a:schemeClr val="lt1"/>
-          </a:fontRef>
-        </p:style>
-        <p:txBody>
-          <a:bodyPr rtlCol="0" anchor="ctr"/>
-          <a:lstStyle/>
-          <a:p>
-            <a:pPr algn="ctr"/>
-            <a:endParaRPr/>
-          </a:p>
-        </p:txBody>
-      </p:sp>
-      <p:sp>
-        <p:nvSpPr>
-          <p:cNvPr id="19" name="Rectangle 18"/>
-          <p:cNvSpPr/>
-          <p:nvPr/>
-        </p:nvSpPr>
-        <p:spPr>
-          <a:xfrm>
-            <a:off x="6309359" y="1463040"/>
-            <a:ext cx="5715000" cy="73152"/>
-          </a:xfrm>
-          <a:prstGeom prst="rect">
-            <a:avLst/>
-          </a:prstGeom>
-          <a:solidFill>
-            <a:srgbClr val="00D2BF"/>
-          </a:solidFill>
-          <a:ln>
-            <a:noFill/>
-          </a:ln>
-        </p:spPr>
-        <p:style>
-          <a:lnRef idx="1">
-            <a:schemeClr val="accent1"/>
-          </a:lnRef>
-          <a:fillRef idx="3">
-            <a:schemeClr val="accent1"/>
-          </a:fillRef>
-          <a:effectRef idx="2">
-            <a:schemeClr val="accent1"/>
-          </a:effectRef>
-          <a:fontRef idx="minor">
-            <a:schemeClr val="lt1"/>
-          </a:fontRef>
-        </p:style>
-        <p:txBody>
-          <a:bodyPr rtlCol="0" anchor="ctr"/>
-          <a:lstStyle/>
-          <a:p>
-            <a:pPr algn="ctr"/>
-            <a:endParaRPr/>
-          </a:p>
-        </p:txBody>
-      </p:sp>
-      <p:sp>
-        <p:nvSpPr>
-          <p:cNvPr id="20" name="Rectangle 19"/>
-          <p:cNvSpPr/>
-          <p:nvPr/>
-        </p:nvSpPr>
-        <p:spPr>
-          <a:xfrm>
-            <a:off x="6309359" y="1463040"/>
-            <a:ext cx="5715000" cy="594360"/>
-          </a:xfrm>
-          <a:prstGeom prst="rect">
-            <a:avLst/>
-          </a:prstGeom>
-          <a:solidFill>
-            <a:srgbClr val="1A1A2E"/>
-          </a:solidFill>
-          <a:ln>
-            <a:noFill/>
-          </a:ln>
-        </p:spPr>
-        <p:style>
-          <a:lnRef idx="1">
-            <a:schemeClr val="accent1"/>
-          </a:lnRef>
-          <a:fillRef idx="3">
-            <a:schemeClr val="accent1"/>
-          </a:fillRef>
-          <a:effectRef idx="2">
-            <a:schemeClr val="accent1"/>
-          </a:effectRef>
-          <a:fontRef idx="minor">
-            <a:schemeClr val="lt1"/>
-          </a:fontRef>
-        </p:style>
-        <p:txBody>
-          <a:bodyPr rtlCol="0" anchor="ctr"/>
-          <a:lstStyle/>
-          <a:p>
-            <a:pPr algn="ctr"/>
-            <a:endParaRPr/>
-          </a:p>
-        </p:txBody>
-      </p:sp>
-      <p:sp>
-        <p:nvSpPr>
-          <p:cNvPr id="21" name="TextBox 20"/>
+              <a:rPr lang="en-US" sz="1400" b="1" i="0" dirty="0">
+                <a:solidFill>
+                  <a:srgbClr val="BB86FC"/>
+                </a:solidFill>
+              </a:rPr>
+              <a:t> </a:t>
+            </a:r>
+            <a:r>
+              <a:rPr sz="1400" b="1" i="0" dirty="0">
+                <a:solidFill>
+                  <a:srgbClr val="BB86FC"/>
+                </a:solidFill>
+              </a:rPr>
+              <a:t>Perspectives </a:t>
+            </a:r>
+            <a:r>
+              <a:rPr sz="1400" b="1" i="0" dirty="0" err="1">
+                <a:solidFill>
+                  <a:srgbClr val="BB86FC"/>
+                </a:solidFill>
+              </a:rPr>
+              <a:t>d'Évolution</a:t>
+            </a:r>
+            <a:endParaRPr sz="1400" b="1" i="0" dirty="0">
+              <a:solidFill>
+                <a:srgbClr val="BB86FC"/>
+              </a:solidFill>
+            </a:endParaRPr>
+          </a:p>
+        </p:txBody>
+      </p:sp>
+      <p:sp>
+        <p:nvSpPr>
+          <p:cNvPr id="19" name="TextBox 18"/>
           <p:cNvSpPr txBox="1"/>
           <p:nvPr/>
         </p:nvSpPr>
         <p:spPr>
           <a:xfrm>
-            <a:off x="6446520" y="1554480"/>
-            <a:ext cx="5394960" cy="307777"/>
+            <a:off x="6446520" y="2148840"/>
+            <a:ext cx="5303520" cy="4206240"/>
           </a:xfrm>
           <a:prstGeom prst="rect">
             <a:avLst/>
@@ -7309,944 +7602,123 @@
           </a:bodyPr>
           <a:lstStyle/>
           <a:p>
-            <a:pPr algn="l"/>
-            <a:r>
-              <a:rPr sz="1400" b="1" i="0" dirty="0">
-                <a:solidFill>
-                  <a:srgbClr val="00D2BF"/>
-                </a:solidFill>
-              </a:rPr>
-              <a:t> </a:t>
-            </a:r>
-            <a:r>
-              <a:rPr sz="1400" b="1" i="0" dirty="0" err="1">
-                <a:solidFill>
-                  <a:srgbClr val="00D2BF"/>
-                </a:solidFill>
-              </a:rPr>
-              <a:t>Synchronisation</a:t>
-            </a:r>
-            <a:r>
-              <a:rPr sz="1400" b="1" i="0" dirty="0">
-                <a:solidFill>
-                  <a:srgbClr val="00D2BF"/>
-                </a:solidFill>
-              </a:rPr>
-              <a:t> État</a:t>
-            </a:r>
-          </a:p>
-        </p:txBody>
-      </p:sp>
-      <p:sp>
-        <p:nvSpPr>
-          <p:cNvPr id="22" name="Rectangle 21"/>
-          <p:cNvSpPr/>
-          <p:nvPr/>
-        </p:nvSpPr>
-        <p:spPr>
-          <a:xfrm>
-            <a:off x="6446520" y="2176272"/>
-            <a:ext cx="73152" cy="502920"/>
-          </a:xfrm>
-          <a:prstGeom prst="rect">
-            <a:avLst/>
-          </a:prstGeom>
-          <a:solidFill>
-            <a:srgbClr val="FF6384"/>
-          </a:solidFill>
-          <a:ln>
-            <a:noFill/>
-          </a:ln>
-        </p:spPr>
-        <p:style>
-          <a:lnRef idx="1">
-            <a:schemeClr val="accent1"/>
-          </a:lnRef>
-          <a:fillRef idx="3">
-            <a:schemeClr val="accent1"/>
-          </a:fillRef>
-          <a:effectRef idx="2">
-            <a:schemeClr val="accent1"/>
-          </a:effectRef>
-          <a:fontRef idx="minor">
-            <a:schemeClr val="lt1"/>
-          </a:fontRef>
-        </p:style>
-        <p:txBody>
-          <a:bodyPr rtlCol="0" anchor="ctr"/>
-          <a:lstStyle/>
-          <a:p>
-            <a:pPr algn="ctr"/>
-            <a:endParaRPr/>
-          </a:p>
-        </p:txBody>
-      </p:sp>
-      <p:sp>
-        <p:nvSpPr>
-          <p:cNvPr id="23" name="TextBox 22"/>
-          <p:cNvSpPr txBox="1"/>
-          <p:nvPr/>
-        </p:nvSpPr>
-        <p:spPr>
-          <a:xfrm>
-            <a:off x="6629399" y="2148840"/>
-            <a:ext cx="5212080" cy="548640"/>
-          </a:xfrm>
-          <a:prstGeom prst="rect">
-            <a:avLst/>
-          </a:prstGeom>
-          <a:noFill/>
-        </p:spPr>
-        <p:txBody>
-          <a:bodyPr wrap="square">
-            <a:spAutoFit/>
-          </a:bodyPr>
-          <a:lstStyle/>
-          <a:p>
-            <a:pPr algn="l"/>
-            <a:r>
-              <a:rPr sz="1150" b="0" i="1">
-                <a:solidFill>
-                  <a:srgbClr val="A0A0C0"/>
-                </a:solidFill>
-              </a:rPr>
-              <a:t>Défi  ›  Cohérence du token et du rôle dans toute l'app React.</a:t>
-            </a:r>
-          </a:p>
-        </p:txBody>
-      </p:sp>
-      <p:sp>
-        <p:nvSpPr>
-          <p:cNvPr id="24" name="Rectangle 23"/>
-          <p:cNvSpPr/>
-          <p:nvPr/>
-        </p:nvSpPr>
-        <p:spPr>
-          <a:xfrm>
-            <a:off x="6446520" y="2761488"/>
-            <a:ext cx="73152" cy="685800"/>
-          </a:xfrm>
-          <a:prstGeom prst="rect">
-            <a:avLst/>
-          </a:prstGeom>
-          <a:solidFill>
-            <a:srgbClr val="00E576"/>
-          </a:solidFill>
-          <a:ln>
-            <a:noFill/>
-          </a:ln>
-        </p:spPr>
-        <p:style>
-          <a:lnRef idx="1">
-            <a:schemeClr val="accent1"/>
-          </a:lnRef>
-          <a:fillRef idx="3">
-            <a:schemeClr val="accent1"/>
-          </a:fillRef>
-          <a:effectRef idx="2">
-            <a:schemeClr val="accent1"/>
-          </a:effectRef>
-          <a:fontRef idx="minor">
-            <a:schemeClr val="lt1"/>
-          </a:fontRef>
-        </p:style>
-        <p:txBody>
-          <a:bodyPr rtlCol="0" anchor="ctr"/>
-          <a:lstStyle/>
-          <a:p>
-            <a:pPr algn="ctr"/>
-            <a:endParaRPr/>
-          </a:p>
-        </p:txBody>
-      </p:sp>
-      <p:sp>
-        <p:nvSpPr>
-          <p:cNvPr id="25" name="TextBox 24"/>
-          <p:cNvSpPr txBox="1"/>
-          <p:nvPr/>
-        </p:nvSpPr>
-        <p:spPr>
-          <a:xfrm>
-            <a:off x="6629399" y="2743200"/>
-            <a:ext cx="5212080" cy="777240"/>
-          </a:xfrm>
-          <a:prstGeom prst="rect">
-            <a:avLst/>
-          </a:prstGeom>
-          <a:noFill/>
-        </p:spPr>
-        <p:txBody>
-          <a:bodyPr wrap="square">
-            <a:spAutoFit/>
-          </a:bodyPr>
-          <a:lstStyle/>
-          <a:p>
-            <a:pPr algn="l"/>
-            <a:r>
-              <a:rPr sz="1150" b="1" i="0">
-                <a:solidFill>
-                  <a:srgbClr val="E0E0FF"/>
-                </a:solidFill>
-              </a:rPr>
-              <a:t>Solution  ›  Redux AuthSlice + localStorage + Axios interceptor auto.</a:t>
-            </a:r>
-          </a:p>
-        </p:txBody>
-      </p:sp>
-      <p:sp>
-        <p:nvSpPr>
-          <p:cNvPr id="26" name="Rectangle 25"/>
-          <p:cNvSpPr/>
-          <p:nvPr/>
-        </p:nvSpPr>
-        <p:spPr>
-          <a:xfrm>
-            <a:off x="274320" y="4005072"/>
-            <a:ext cx="5715000" cy="2331720"/>
-          </a:xfrm>
-          <a:prstGeom prst="rect">
-            <a:avLst/>
-          </a:prstGeom>
-          <a:solidFill>
-            <a:srgbClr val="16213E"/>
-          </a:solidFill>
-          <a:ln>
-            <a:noFill/>
-          </a:ln>
-        </p:spPr>
-        <p:style>
-          <a:lnRef idx="1">
-            <a:schemeClr val="accent1"/>
-          </a:lnRef>
-          <a:fillRef idx="3">
-            <a:schemeClr val="accent1"/>
-          </a:fillRef>
-          <a:effectRef idx="2">
-            <a:schemeClr val="accent1"/>
-          </a:effectRef>
-          <a:fontRef idx="minor">
-            <a:schemeClr val="lt1"/>
-          </a:fontRef>
-        </p:style>
-        <p:txBody>
-          <a:bodyPr rtlCol="0" anchor="ctr"/>
-          <a:lstStyle/>
-          <a:p>
-            <a:pPr algn="ctr"/>
-            <a:endParaRPr/>
-          </a:p>
-        </p:txBody>
-      </p:sp>
-      <p:sp>
-        <p:nvSpPr>
-          <p:cNvPr id="27" name="Rectangle 26"/>
-          <p:cNvSpPr/>
-          <p:nvPr/>
-        </p:nvSpPr>
-        <p:spPr>
-          <a:xfrm>
-            <a:off x="274320" y="4005072"/>
-            <a:ext cx="5715000" cy="73152"/>
-          </a:xfrm>
-          <a:prstGeom prst="rect">
-            <a:avLst/>
-          </a:prstGeom>
-          <a:solidFill>
-            <a:srgbClr val="F3C623"/>
-          </a:solidFill>
-          <a:ln>
-            <a:noFill/>
-          </a:ln>
-        </p:spPr>
-        <p:style>
-          <a:lnRef idx="1">
-            <a:schemeClr val="accent1"/>
-          </a:lnRef>
-          <a:fillRef idx="3">
-            <a:schemeClr val="accent1"/>
-          </a:fillRef>
-          <a:effectRef idx="2">
-            <a:schemeClr val="accent1"/>
-          </a:effectRef>
-          <a:fontRef idx="minor">
-            <a:schemeClr val="lt1"/>
-          </a:fontRef>
-        </p:style>
-        <p:txBody>
-          <a:bodyPr rtlCol="0" anchor="ctr"/>
-          <a:lstStyle/>
-          <a:p>
-            <a:pPr algn="ctr"/>
-            <a:endParaRPr/>
-          </a:p>
-        </p:txBody>
-      </p:sp>
-      <p:sp>
-        <p:nvSpPr>
-          <p:cNvPr id="28" name="Rectangle 27"/>
-          <p:cNvSpPr/>
-          <p:nvPr/>
-        </p:nvSpPr>
-        <p:spPr>
-          <a:xfrm>
-            <a:off x="274320" y="4005072"/>
-            <a:ext cx="5715000" cy="594360"/>
-          </a:xfrm>
-          <a:prstGeom prst="rect">
-            <a:avLst/>
-          </a:prstGeom>
-          <a:solidFill>
-            <a:srgbClr val="1A1A2E"/>
-          </a:solidFill>
-          <a:ln>
-            <a:noFill/>
-          </a:ln>
-        </p:spPr>
-        <p:style>
-          <a:lnRef idx="1">
-            <a:schemeClr val="accent1"/>
-          </a:lnRef>
-          <a:fillRef idx="3">
-            <a:schemeClr val="accent1"/>
-          </a:fillRef>
-          <a:effectRef idx="2">
-            <a:schemeClr val="accent1"/>
-          </a:effectRef>
-          <a:fontRef idx="minor">
-            <a:schemeClr val="lt1"/>
-          </a:fontRef>
-        </p:style>
-        <p:txBody>
-          <a:bodyPr rtlCol="0" anchor="ctr"/>
-          <a:lstStyle/>
-          <a:p>
-            <a:pPr algn="ctr"/>
-            <a:endParaRPr/>
-          </a:p>
-        </p:txBody>
-      </p:sp>
-      <p:sp>
-        <p:nvSpPr>
-          <p:cNvPr id="29" name="TextBox 28"/>
-          <p:cNvSpPr txBox="1"/>
-          <p:nvPr/>
-        </p:nvSpPr>
-        <p:spPr>
-          <a:xfrm>
-            <a:off x="411479" y="4096511"/>
-            <a:ext cx="5394960" cy="307777"/>
-          </a:xfrm>
-          <a:prstGeom prst="rect">
-            <a:avLst/>
-          </a:prstGeom>
-          <a:noFill/>
-        </p:spPr>
-        <p:txBody>
-          <a:bodyPr wrap="square">
-            <a:spAutoFit/>
-          </a:bodyPr>
-          <a:lstStyle/>
-          <a:p>
-            <a:pPr algn="l"/>
-            <a:r>
-              <a:rPr sz="1400" b="1" i="0" dirty="0">
-                <a:solidFill>
-                  <a:srgbClr val="F3C623"/>
-                </a:solidFill>
-              </a:rPr>
-              <a:t>  </a:t>
-            </a:r>
-            <a:r>
-              <a:rPr sz="1400" b="1" i="0" dirty="0" err="1">
-                <a:solidFill>
-                  <a:srgbClr val="F3C623"/>
-                </a:solidFill>
-              </a:rPr>
-              <a:t>Disponibilité</a:t>
-            </a:r>
-            <a:r>
-              <a:rPr sz="1400" b="1" i="0" dirty="0">
-                <a:solidFill>
-                  <a:srgbClr val="F3C623"/>
-                </a:solidFill>
-              </a:rPr>
-              <a:t> </a:t>
-            </a:r>
-            <a:r>
-              <a:rPr sz="1400" b="1" i="0" dirty="0" err="1">
-                <a:solidFill>
-                  <a:srgbClr val="F3C623"/>
-                </a:solidFill>
-              </a:rPr>
-              <a:t>Créneaux</a:t>
-            </a:r>
-            <a:endParaRPr sz="1400" b="1" i="0" dirty="0">
-              <a:solidFill>
-                <a:srgbClr val="F3C623"/>
-              </a:solidFill>
-            </a:endParaRPr>
-          </a:p>
-        </p:txBody>
-      </p:sp>
-      <p:sp>
-        <p:nvSpPr>
-          <p:cNvPr id="30" name="Rectangle 29"/>
-          <p:cNvSpPr/>
-          <p:nvPr/>
-        </p:nvSpPr>
-        <p:spPr>
-          <a:xfrm>
-            <a:off x="411479" y="4718304"/>
-            <a:ext cx="73152" cy="502920"/>
-          </a:xfrm>
-          <a:prstGeom prst="rect">
-            <a:avLst/>
-          </a:prstGeom>
-          <a:solidFill>
-            <a:srgbClr val="FF6384"/>
-          </a:solidFill>
-          <a:ln>
-            <a:noFill/>
-          </a:ln>
-        </p:spPr>
-        <p:style>
-          <a:lnRef idx="1">
-            <a:schemeClr val="accent1"/>
-          </a:lnRef>
-          <a:fillRef idx="3">
-            <a:schemeClr val="accent1"/>
-          </a:fillRef>
-          <a:effectRef idx="2">
-            <a:schemeClr val="accent1"/>
-          </a:effectRef>
-          <a:fontRef idx="minor">
-            <a:schemeClr val="lt1"/>
-          </a:fontRef>
-        </p:style>
-        <p:txBody>
-          <a:bodyPr rtlCol="0" anchor="ctr"/>
-          <a:lstStyle/>
-          <a:p>
-            <a:pPr algn="ctr"/>
-            <a:endParaRPr/>
-          </a:p>
-        </p:txBody>
-      </p:sp>
-      <p:sp>
-        <p:nvSpPr>
-          <p:cNvPr id="31" name="TextBox 30"/>
-          <p:cNvSpPr txBox="1"/>
-          <p:nvPr/>
-        </p:nvSpPr>
-        <p:spPr>
-          <a:xfrm>
-            <a:off x="594359" y="4690872"/>
-            <a:ext cx="5212080" cy="548640"/>
-          </a:xfrm>
-          <a:prstGeom prst="rect">
-            <a:avLst/>
-          </a:prstGeom>
-          <a:noFill/>
-        </p:spPr>
-        <p:txBody>
-          <a:bodyPr wrap="square">
-            <a:spAutoFit/>
-          </a:bodyPr>
-          <a:lstStyle/>
-          <a:p>
-            <a:pPr algn="l"/>
-            <a:r>
-              <a:rPr sz="1150" b="0" i="1" dirty="0" err="1">
-                <a:solidFill>
-                  <a:srgbClr val="A0A0C0"/>
-                </a:solidFill>
-              </a:rPr>
-              <a:t>Défi</a:t>
-            </a:r>
-            <a:r>
-              <a:rPr sz="1150" b="0" i="1" dirty="0">
-                <a:solidFill>
-                  <a:srgbClr val="A0A0C0"/>
-                </a:solidFill>
-              </a:rPr>
-              <a:t>  ›  </a:t>
-            </a:r>
-            <a:r>
-              <a:rPr sz="1150" b="0" i="1" dirty="0" err="1">
-                <a:solidFill>
-                  <a:srgbClr val="A0A0C0"/>
-                </a:solidFill>
-              </a:rPr>
-              <a:t>Éviter</a:t>
-            </a:r>
-            <a:r>
-              <a:rPr sz="1150" b="0" i="1" dirty="0">
-                <a:solidFill>
-                  <a:srgbClr val="A0A0C0"/>
-                </a:solidFill>
-              </a:rPr>
-              <a:t> les doubles </a:t>
-            </a:r>
-            <a:r>
-              <a:rPr sz="1150" b="0" i="1" dirty="0" err="1">
-                <a:solidFill>
-                  <a:srgbClr val="A0A0C0"/>
-                </a:solidFill>
-              </a:rPr>
-              <a:t>réservations</a:t>
-            </a:r>
-            <a:r>
-              <a:rPr sz="1150" b="0" i="1" dirty="0">
-                <a:solidFill>
-                  <a:srgbClr val="A0A0C0"/>
-                </a:solidFill>
-              </a:rPr>
-              <a:t> </a:t>
-            </a:r>
-            <a:r>
-              <a:rPr sz="1150" b="0" i="1" dirty="0" err="1">
-                <a:solidFill>
-                  <a:srgbClr val="A0A0C0"/>
-                </a:solidFill>
-              </a:rPr>
-              <a:t>simultanées</a:t>
-            </a:r>
-            <a:r>
-              <a:rPr sz="1150" b="0" i="1" dirty="0">
-                <a:solidFill>
-                  <a:srgbClr val="A0A0C0"/>
-                </a:solidFill>
-              </a:rPr>
-              <a:t>.</a:t>
-            </a:r>
-          </a:p>
-        </p:txBody>
-      </p:sp>
-      <p:sp>
-        <p:nvSpPr>
-          <p:cNvPr id="32" name="Rectangle 31"/>
-          <p:cNvSpPr/>
-          <p:nvPr/>
-        </p:nvSpPr>
-        <p:spPr>
-          <a:xfrm>
-            <a:off x="411479" y="5303520"/>
-            <a:ext cx="73152" cy="685800"/>
-          </a:xfrm>
-          <a:prstGeom prst="rect">
-            <a:avLst/>
-          </a:prstGeom>
-          <a:solidFill>
-            <a:srgbClr val="00E576"/>
-          </a:solidFill>
-          <a:ln>
-            <a:noFill/>
-          </a:ln>
-        </p:spPr>
-        <p:style>
-          <a:lnRef idx="1">
-            <a:schemeClr val="accent1"/>
-          </a:lnRef>
-          <a:fillRef idx="3">
-            <a:schemeClr val="accent1"/>
-          </a:fillRef>
-          <a:effectRef idx="2">
-            <a:schemeClr val="accent1"/>
-          </a:effectRef>
-          <a:fontRef idx="minor">
-            <a:schemeClr val="lt1"/>
-          </a:fontRef>
-        </p:style>
-        <p:txBody>
-          <a:bodyPr rtlCol="0" anchor="ctr"/>
-          <a:lstStyle/>
-          <a:p>
-            <a:pPr algn="ctr"/>
-            <a:endParaRPr/>
-          </a:p>
-        </p:txBody>
-      </p:sp>
-      <p:sp>
-        <p:nvSpPr>
-          <p:cNvPr id="33" name="TextBox 32"/>
-          <p:cNvSpPr txBox="1"/>
-          <p:nvPr/>
-        </p:nvSpPr>
-        <p:spPr>
-          <a:xfrm>
-            <a:off x="594359" y="5285231"/>
-            <a:ext cx="5212080" cy="777240"/>
-          </a:xfrm>
-          <a:prstGeom prst="rect">
-            <a:avLst/>
-          </a:prstGeom>
-          <a:noFill/>
-        </p:spPr>
-        <p:txBody>
-          <a:bodyPr wrap="square">
-            <a:spAutoFit/>
-          </a:bodyPr>
-          <a:lstStyle/>
-          <a:p>
-            <a:pPr algn="l"/>
-            <a:r>
-              <a:rPr sz="1150" b="1" i="0">
-                <a:solidFill>
-                  <a:srgbClr val="E0E0FF"/>
-                </a:solidFill>
-              </a:rPr>
-              <a:t>Solution  ›  Champ 'disponible' mis à jour en BDD lors de la réservation.</a:t>
-            </a:r>
-          </a:p>
-        </p:txBody>
-      </p:sp>
-      <p:sp>
-        <p:nvSpPr>
-          <p:cNvPr id="34" name="Rectangle 33"/>
-          <p:cNvSpPr/>
-          <p:nvPr/>
-        </p:nvSpPr>
-        <p:spPr>
-          <a:xfrm>
-            <a:off x="6309359" y="4005072"/>
-            <a:ext cx="5715000" cy="2331720"/>
-          </a:xfrm>
-          <a:prstGeom prst="rect">
-            <a:avLst/>
-          </a:prstGeom>
-          <a:solidFill>
-            <a:srgbClr val="16213E"/>
-          </a:solidFill>
-          <a:ln>
-            <a:noFill/>
-          </a:ln>
-        </p:spPr>
-        <p:style>
-          <a:lnRef idx="1">
-            <a:schemeClr val="accent1"/>
-          </a:lnRef>
-          <a:fillRef idx="3">
-            <a:schemeClr val="accent1"/>
-          </a:fillRef>
-          <a:effectRef idx="2">
-            <a:schemeClr val="accent1"/>
-          </a:effectRef>
-          <a:fontRef idx="minor">
-            <a:schemeClr val="lt1"/>
-          </a:fontRef>
-        </p:style>
-        <p:txBody>
-          <a:bodyPr rtlCol="0" anchor="ctr"/>
-          <a:lstStyle/>
-          <a:p>
-            <a:pPr algn="ctr"/>
-            <a:endParaRPr/>
-          </a:p>
-        </p:txBody>
-      </p:sp>
-      <p:sp>
-        <p:nvSpPr>
-          <p:cNvPr id="35" name="Rectangle 34"/>
-          <p:cNvSpPr/>
-          <p:nvPr/>
-        </p:nvSpPr>
-        <p:spPr>
-          <a:xfrm>
-            <a:off x="6309359" y="4005072"/>
-            <a:ext cx="5715000" cy="73152"/>
-          </a:xfrm>
-          <a:prstGeom prst="rect">
-            <a:avLst/>
-          </a:prstGeom>
-          <a:solidFill>
-            <a:srgbClr val="FF6384"/>
-          </a:solidFill>
-          <a:ln>
-            <a:noFill/>
-          </a:ln>
-        </p:spPr>
-        <p:style>
-          <a:lnRef idx="1">
-            <a:schemeClr val="accent1"/>
-          </a:lnRef>
-          <a:fillRef idx="3">
-            <a:schemeClr val="accent1"/>
-          </a:fillRef>
-          <a:effectRef idx="2">
-            <a:schemeClr val="accent1"/>
-          </a:effectRef>
-          <a:fontRef idx="minor">
-            <a:schemeClr val="lt1"/>
-          </a:fontRef>
-        </p:style>
-        <p:txBody>
-          <a:bodyPr rtlCol="0" anchor="ctr"/>
-          <a:lstStyle/>
-          <a:p>
-            <a:pPr algn="ctr"/>
-            <a:endParaRPr/>
-          </a:p>
-        </p:txBody>
-      </p:sp>
-      <p:sp>
-        <p:nvSpPr>
-          <p:cNvPr id="36" name="Rectangle 35"/>
-          <p:cNvSpPr/>
-          <p:nvPr/>
-        </p:nvSpPr>
-        <p:spPr>
-          <a:xfrm>
-            <a:off x="6309359" y="4005072"/>
-            <a:ext cx="5715000" cy="594360"/>
-          </a:xfrm>
-          <a:prstGeom prst="rect">
-            <a:avLst/>
-          </a:prstGeom>
-          <a:solidFill>
-            <a:srgbClr val="1A1A2E"/>
-          </a:solidFill>
-          <a:ln>
-            <a:noFill/>
-          </a:ln>
-        </p:spPr>
-        <p:style>
-          <a:lnRef idx="1">
-            <a:schemeClr val="accent1"/>
-          </a:lnRef>
-          <a:fillRef idx="3">
-            <a:schemeClr val="accent1"/>
-          </a:fillRef>
-          <a:effectRef idx="2">
-            <a:schemeClr val="accent1"/>
-          </a:effectRef>
-          <a:fontRef idx="minor">
-            <a:schemeClr val="lt1"/>
-          </a:fontRef>
-        </p:style>
-        <p:txBody>
-          <a:bodyPr rtlCol="0" anchor="ctr"/>
-          <a:lstStyle/>
-          <a:p>
-            <a:pPr algn="ctr"/>
-            <a:endParaRPr/>
-          </a:p>
-        </p:txBody>
-      </p:sp>
-      <p:sp>
-        <p:nvSpPr>
-          <p:cNvPr id="37" name="TextBox 36"/>
-          <p:cNvSpPr txBox="1"/>
-          <p:nvPr/>
-        </p:nvSpPr>
-        <p:spPr>
-          <a:xfrm>
-            <a:off x="6446520" y="4096511"/>
-            <a:ext cx="5394960" cy="307777"/>
-          </a:xfrm>
-          <a:prstGeom prst="rect">
-            <a:avLst/>
-          </a:prstGeom>
-          <a:noFill/>
-        </p:spPr>
-        <p:txBody>
-          <a:bodyPr wrap="square">
-            <a:spAutoFit/>
-          </a:bodyPr>
-          <a:lstStyle/>
-          <a:p>
-            <a:pPr algn="l"/>
-            <a:r>
-              <a:rPr sz="1400" b="1" i="0" dirty="0">
-                <a:solidFill>
-                  <a:srgbClr val="FF6384"/>
-                </a:solidFill>
-              </a:rPr>
-              <a:t> </a:t>
-            </a:r>
-            <a:r>
-              <a:rPr sz="1400" b="1" i="0" dirty="0" err="1">
-                <a:solidFill>
-                  <a:srgbClr val="FF6384"/>
-                </a:solidFill>
-              </a:rPr>
-              <a:t>Intégration</a:t>
-            </a:r>
-            <a:r>
-              <a:rPr sz="1400" b="1" i="0" dirty="0">
-                <a:solidFill>
-                  <a:srgbClr val="FF6384"/>
-                </a:solidFill>
-              </a:rPr>
-              <a:t> </a:t>
-            </a:r>
-            <a:r>
-              <a:rPr sz="1400" b="1" i="0" dirty="0" err="1">
-                <a:solidFill>
-                  <a:srgbClr val="FF6384"/>
-                </a:solidFill>
-              </a:rPr>
-              <a:t>Calendrier</a:t>
-            </a:r>
-            <a:endParaRPr sz="1400" b="1" i="0" dirty="0">
-              <a:solidFill>
-                <a:srgbClr val="FF6384"/>
-              </a:solidFill>
-            </a:endParaRPr>
-          </a:p>
-        </p:txBody>
-      </p:sp>
-      <p:sp>
-        <p:nvSpPr>
-          <p:cNvPr id="38" name="Rectangle 37"/>
-          <p:cNvSpPr/>
-          <p:nvPr/>
-        </p:nvSpPr>
-        <p:spPr>
-          <a:xfrm>
-            <a:off x="6446520" y="4718304"/>
-            <a:ext cx="73152" cy="502920"/>
-          </a:xfrm>
-          <a:prstGeom prst="rect">
-            <a:avLst/>
-          </a:prstGeom>
-          <a:solidFill>
-            <a:srgbClr val="FF6384"/>
-          </a:solidFill>
-          <a:ln>
-            <a:noFill/>
-          </a:ln>
-        </p:spPr>
-        <p:style>
-          <a:lnRef idx="1">
-            <a:schemeClr val="accent1"/>
-          </a:lnRef>
-          <a:fillRef idx="3">
-            <a:schemeClr val="accent1"/>
-          </a:fillRef>
-          <a:effectRef idx="2">
-            <a:schemeClr val="accent1"/>
-          </a:effectRef>
-          <a:fontRef idx="minor">
-            <a:schemeClr val="lt1"/>
-          </a:fontRef>
-        </p:style>
-        <p:txBody>
-          <a:bodyPr rtlCol="0" anchor="ctr"/>
-          <a:lstStyle/>
-          <a:p>
-            <a:pPr algn="ctr"/>
-            <a:endParaRPr/>
-          </a:p>
-        </p:txBody>
-      </p:sp>
-      <p:sp>
-        <p:nvSpPr>
-          <p:cNvPr id="39" name="TextBox 38"/>
-          <p:cNvSpPr txBox="1"/>
-          <p:nvPr/>
-        </p:nvSpPr>
-        <p:spPr>
-          <a:xfrm>
-            <a:off x="6629399" y="4690872"/>
-            <a:ext cx="5212080" cy="548640"/>
-          </a:xfrm>
-          <a:prstGeom prst="rect">
-            <a:avLst/>
-          </a:prstGeom>
-          <a:noFill/>
-        </p:spPr>
-        <p:txBody>
-          <a:bodyPr wrap="square">
-            <a:spAutoFit/>
-          </a:bodyPr>
-          <a:lstStyle/>
-          <a:p>
-            <a:pPr algn="l"/>
-            <a:r>
-              <a:rPr sz="1150" b="0" i="1">
-                <a:solidFill>
-                  <a:srgbClr val="A0A0C0"/>
-                </a:solidFill>
-              </a:rPr>
-              <a:t>Défi  ›  Affichage correct des RDV selon les plages horaires.</a:t>
-            </a:r>
-          </a:p>
-        </p:txBody>
-      </p:sp>
-      <p:sp>
-        <p:nvSpPr>
-          <p:cNvPr id="40" name="Rectangle 39"/>
-          <p:cNvSpPr/>
-          <p:nvPr/>
-        </p:nvSpPr>
-        <p:spPr>
-          <a:xfrm>
-            <a:off x="6446520" y="5303520"/>
-            <a:ext cx="73152" cy="685800"/>
-          </a:xfrm>
-          <a:prstGeom prst="rect">
-            <a:avLst/>
-          </a:prstGeom>
-          <a:solidFill>
-            <a:srgbClr val="00E576"/>
-          </a:solidFill>
-          <a:ln>
-            <a:noFill/>
-          </a:ln>
-        </p:spPr>
-        <p:style>
-          <a:lnRef idx="1">
-            <a:schemeClr val="accent1"/>
-          </a:lnRef>
-          <a:fillRef idx="3">
-            <a:schemeClr val="accent1"/>
-          </a:fillRef>
-          <a:effectRef idx="2">
-            <a:schemeClr val="accent1"/>
-          </a:effectRef>
-          <a:fontRef idx="minor">
-            <a:schemeClr val="lt1"/>
-          </a:fontRef>
-        </p:style>
-        <p:txBody>
-          <a:bodyPr rtlCol="0" anchor="ctr"/>
-          <a:lstStyle/>
-          <a:p>
-            <a:pPr algn="ctr"/>
-            <a:endParaRPr/>
-          </a:p>
-        </p:txBody>
-      </p:sp>
-      <p:sp>
-        <p:nvSpPr>
-          <p:cNvPr id="41" name="TextBox 40"/>
-          <p:cNvSpPr txBox="1"/>
-          <p:nvPr/>
-        </p:nvSpPr>
-        <p:spPr>
-          <a:xfrm>
-            <a:off x="6629399" y="5285231"/>
-            <a:ext cx="5212080" cy="777240"/>
-          </a:xfrm>
-          <a:prstGeom prst="rect">
-            <a:avLst/>
-          </a:prstGeom>
-          <a:noFill/>
-        </p:spPr>
-        <p:txBody>
-          <a:bodyPr wrap="square">
-            <a:spAutoFit/>
-          </a:bodyPr>
-          <a:lstStyle/>
-          <a:p>
-            <a:pPr algn="l"/>
-            <a:r>
-              <a:rPr sz="1150" b="1" i="0">
-                <a:solidFill>
-                  <a:srgbClr val="E0E0FF"/>
-                </a:solidFill>
-              </a:rPr>
-              <a:t>Solution  ›  FullCalendar 6 avec plugins DayGrid, TimeGrid, Interaction.</a:t>
+            <a:pPr>
+              <a:spcBef>
+                <a:spcPts val="800"/>
+              </a:spcBef>
+            </a:pPr>
+            <a:r>
+              <a:rPr sz="1250">
+                <a:solidFill>
+                  <a:srgbClr val="E0E0FF"/>
+                </a:solidFill>
+              </a:rPr>
+              <a:t>→  Notifications email / SMS automatiques</a:t>
+            </a:r>
+          </a:p>
+          <a:p>
+            <a:pPr>
+              <a:spcBef>
+                <a:spcPts val="800"/>
+              </a:spcBef>
+            </a:pPr>
+            <a:r>
+              <a:rPr sz="1250">
+                <a:solidFill>
+                  <a:srgbClr val="E0E0FF"/>
+                </a:solidFill>
+              </a:rPr>
+              <a:t>→  Application mobile (React Native / Flutter)</a:t>
+            </a:r>
+          </a:p>
+          <a:p>
+            <a:pPr>
+              <a:spcBef>
+                <a:spcPts val="800"/>
+              </a:spcBef>
+            </a:pPr>
+            <a:r>
+              <a:rPr sz="1250">
+                <a:solidFill>
+                  <a:srgbClr val="E0E0FF"/>
+                </a:solidFill>
+              </a:rPr>
+              <a:t>→  Paiement en ligne des consultations</a:t>
+            </a:r>
+          </a:p>
+          <a:p>
+            <a:pPr>
+              <a:spcBef>
+                <a:spcPts val="800"/>
+              </a:spcBef>
+            </a:pPr>
+            <a:r>
+              <a:rPr sz="1250">
+                <a:solidFill>
+                  <a:srgbClr val="E0E0FF"/>
+                </a:solidFill>
+              </a:rPr>
+              <a:t>→  Dossier médical patient numérique</a:t>
+            </a:r>
+          </a:p>
+          <a:p>
+            <a:pPr>
+              <a:spcBef>
+                <a:spcPts val="800"/>
+              </a:spcBef>
+            </a:pPr>
+            <a:r>
+              <a:rPr sz="1250">
+                <a:solidFill>
+                  <a:srgbClr val="E0E0FF"/>
+                </a:solidFill>
+              </a:rPr>
+              <a:t>→  Tableau de bord analytique &amp; statistiques</a:t>
+            </a:r>
+          </a:p>
+          <a:p>
+            <a:pPr>
+              <a:spcBef>
+                <a:spcPts val="800"/>
+              </a:spcBef>
+            </a:pPr>
+            <a:r>
+              <a:rPr sz="1250">
+                <a:solidFill>
+                  <a:srgbClr val="E0E0FF"/>
+                </a:solidFill>
+              </a:rPr>
+              <a:t>→  Géolocalisation des cabinets médicaux</a:t>
+            </a:r>
+          </a:p>
+          <a:p>
+            <a:pPr>
+              <a:spcBef>
+                <a:spcPts val="800"/>
+              </a:spcBef>
+            </a:pPr>
+            <a:r>
+              <a:rPr sz="1250">
+                <a:solidFill>
+                  <a:srgbClr val="E0E0FF"/>
+                </a:solidFill>
+              </a:rPr>
+              <a:t>→  Intégration systèmes hospitaliers (HL7)</a:t>
+            </a:r>
+          </a:p>
+          <a:p>
+            <a:pPr>
+              <a:spcBef>
+                <a:spcPts val="800"/>
+              </a:spcBef>
+            </a:pPr>
+            <a:r>
+              <a:rPr sz="1250">
+                <a:solidFill>
+                  <a:srgbClr val="E0E0FF"/>
+                </a:solidFill>
+              </a:rPr>
+              <a:t>→  Déploiement cloud (AWS / VPS)</a:t>
             </a:r>
           </a:p>
         </p:txBody>
@@ -8328,1265 +7800,6 @@
         </p:nvSpPr>
         <p:spPr>
           <a:xfrm>
-            <a:off x="0" y="0"/>
-            <a:ext cx="64008" cy="6858000"/>
-          </a:xfrm>
-          <a:prstGeom prst="rect">
-            <a:avLst/>
-          </a:prstGeom>
-          <a:solidFill>
-            <a:srgbClr val="F3C623"/>
-          </a:solidFill>
-          <a:ln>
-            <a:noFill/>
-          </a:ln>
-        </p:spPr>
-        <p:style>
-          <a:lnRef idx="1">
-            <a:schemeClr val="accent1"/>
-          </a:lnRef>
-          <a:fillRef idx="3">
-            <a:schemeClr val="accent1"/>
-          </a:fillRef>
-          <a:effectRef idx="2">
-            <a:schemeClr val="accent1"/>
-          </a:effectRef>
-          <a:fontRef idx="minor">
-            <a:schemeClr val="lt1"/>
-          </a:fontRef>
-        </p:style>
-        <p:txBody>
-          <a:bodyPr rtlCol="0" anchor="ctr"/>
-          <a:lstStyle/>
-          <a:p>
-            <a:pPr algn="ctr"/>
-            <a:endParaRPr/>
-          </a:p>
-        </p:txBody>
-      </p:sp>
-      <p:sp>
-        <p:nvSpPr>
-          <p:cNvPr id="4" name="TextBox 3"/>
-          <p:cNvSpPr txBox="1"/>
-          <p:nvPr/>
-        </p:nvSpPr>
-        <p:spPr>
-          <a:xfrm>
-            <a:off x="320040" y="228600"/>
-            <a:ext cx="10972800" cy="685800"/>
-          </a:xfrm>
-          <a:prstGeom prst="rect">
-            <a:avLst/>
-          </a:prstGeom>
-          <a:noFill/>
-        </p:spPr>
-        <p:txBody>
-          <a:bodyPr wrap="square">
-            <a:spAutoFit/>
-          </a:bodyPr>
-          <a:lstStyle/>
-          <a:p>
-            <a:pPr algn="l"/>
-            <a:r>
-              <a:rPr sz="3000" b="1" i="0">
-                <a:solidFill>
-                  <a:srgbClr val="FFFFFF"/>
-                </a:solidFill>
-              </a:rPr>
-              <a:t>Conclusion &amp; Perspectives</a:t>
-            </a:r>
-          </a:p>
-        </p:txBody>
-      </p:sp>
-      <p:sp>
-        <p:nvSpPr>
-          <p:cNvPr id="5" name="TextBox 4"/>
-          <p:cNvSpPr txBox="1"/>
-          <p:nvPr/>
-        </p:nvSpPr>
-        <p:spPr>
-          <a:xfrm>
-            <a:off x="320040" y="868680"/>
-            <a:ext cx="10972800" cy="365760"/>
-          </a:xfrm>
-          <a:prstGeom prst="rect">
-            <a:avLst/>
-          </a:prstGeom>
-          <a:noFill/>
-        </p:spPr>
-        <p:txBody>
-          <a:bodyPr wrap="square">
-            <a:spAutoFit/>
-          </a:bodyPr>
-          <a:lstStyle/>
-          <a:p>
-            <a:pPr algn="l"/>
-            <a:r>
-              <a:rPr sz="1300" b="0" i="1">
-                <a:solidFill>
-                  <a:srgbClr val="A0A0C0"/>
-                </a:solidFill>
-              </a:rPr>
-              <a:t>Ce que ce stage m'a apporté — et ce qui reste à faire</a:t>
-            </a:r>
-          </a:p>
-        </p:txBody>
-      </p:sp>
-      <p:sp>
-        <p:nvSpPr>
-          <p:cNvPr id="6" name="Rectangle 5"/>
-          <p:cNvSpPr/>
-          <p:nvPr/>
-        </p:nvSpPr>
-        <p:spPr>
-          <a:xfrm>
-            <a:off x="320040" y="1188720"/>
-            <a:ext cx="1828800" cy="54864"/>
-          </a:xfrm>
-          <a:prstGeom prst="rect">
-            <a:avLst/>
-          </a:prstGeom>
-          <a:solidFill>
-            <a:srgbClr val="F3C623"/>
-          </a:solidFill>
-          <a:ln>
-            <a:noFill/>
-          </a:ln>
-        </p:spPr>
-        <p:style>
-          <a:lnRef idx="1">
-            <a:schemeClr val="accent1"/>
-          </a:lnRef>
-          <a:fillRef idx="3">
-            <a:schemeClr val="accent1"/>
-          </a:fillRef>
-          <a:effectRef idx="2">
-            <a:schemeClr val="accent1"/>
-          </a:effectRef>
-          <a:fontRef idx="minor">
-            <a:schemeClr val="lt1"/>
-          </a:fontRef>
-        </p:style>
-        <p:txBody>
-          <a:bodyPr rtlCol="0" anchor="ctr"/>
-          <a:lstStyle/>
-          <a:p>
-            <a:pPr algn="ctr"/>
-            <a:endParaRPr/>
-          </a:p>
-        </p:txBody>
-      </p:sp>
-      <p:sp>
-        <p:nvSpPr>
-          <p:cNvPr id="7" name="Rectangle 6"/>
-          <p:cNvSpPr/>
-          <p:nvPr/>
-        </p:nvSpPr>
-        <p:spPr>
-          <a:xfrm>
-            <a:off x="2176272" y="1188720"/>
-            <a:ext cx="54864" cy="54864"/>
-          </a:xfrm>
-          <a:prstGeom prst="rect">
-            <a:avLst/>
-          </a:prstGeom>
-          <a:solidFill>
-            <a:srgbClr val="F3C623"/>
-          </a:solidFill>
-          <a:ln>
-            <a:noFill/>
-          </a:ln>
-        </p:spPr>
-        <p:style>
-          <a:lnRef idx="1">
-            <a:schemeClr val="accent1"/>
-          </a:lnRef>
-          <a:fillRef idx="3">
-            <a:schemeClr val="accent1"/>
-          </a:fillRef>
-          <a:effectRef idx="2">
-            <a:schemeClr val="accent1"/>
-          </a:effectRef>
-          <a:fontRef idx="minor">
-            <a:schemeClr val="lt1"/>
-          </a:fontRef>
-        </p:style>
-        <p:txBody>
-          <a:bodyPr rtlCol="0" anchor="ctr"/>
-          <a:lstStyle/>
-          <a:p>
-            <a:pPr algn="ctr"/>
-            <a:endParaRPr/>
-          </a:p>
-        </p:txBody>
-      </p:sp>
-      <p:sp>
-        <p:nvSpPr>
-          <p:cNvPr id="8" name="Rectangle 7"/>
-          <p:cNvSpPr/>
-          <p:nvPr/>
-        </p:nvSpPr>
-        <p:spPr>
-          <a:xfrm>
-            <a:off x="0" y="6675120"/>
-            <a:ext cx="12188952" cy="182880"/>
-          </a:xfrm>
-          <a:prstGeom prst="rect">
-            <a:avLst/>
-          </a:prstGeom>
-          <a:solidFill>
-            <a:srgbClr val="1A1A2E"/>
-          </a:solidFill>
-          <a:ln>
-            <a:noFill/>
-          </a:ln>
-        </p:spPr>
-        <p:style>
-          <a:lnRef idx="1">
-            <a:schemeClr val="accent1"/>
-          </a:lnRef>
-          <a:fillRef idx="3">
-            <a:schemeClr val="accent1"/>
-          </a:fillRef>
-          <a:effectRef idx="2">
-            <a:schemeClr val="accent1"/>
-          </a:effectRef>
-          <a:fontRef idx="minor">
-            <a:schemeClr val="lt1"/>
-          </a:fontRef>
-        </p:style>
-        <p:txBody>
-          <a:bodyPr rtlCol="0" anchor="ctr"/>
-          <a:lstStyle/>
-          <a:p>
-            <a:pPr algn="ctr"/>
-            <a:endParaRPr/>
-          </a:p>
-        </p:txBody>
-      </p:sp>
-      <p:sp>
-        <p:nvSpPr>
-          <p:cNvPr id="9" name="TextBox 8"/>
-          <p:cNvSpPr txBox="1"/>
-          <p:nvPr/>
-        </p:nvSpPr>
-        <p:spPr>
-          <a:xfrm>
-            <a:off x="274320" y="6675120"/>
-            <a:ext cx="11612880" cy="182880"/>
-          </a:xfrm>
-          <a:prstGeom prst="rect">
-            <a:avLst/>
-          </a:prstGeom>
-          <a:noFill/>
-        </p:spPr>
-        <p:txBody>
-          <a:bodyPr wrap="square">
-            <a:spAutoFit/>
-          </a:bodyPr>
-          <a:lstStyle/>
-          <a:p>
-            <a:pPr algn="ctr"/>
-            <a:r>
-              <a:rPr sz="900" b="0" i="0">
-                <a:solidFill>
-                  <a:srgbClr val="A0A0C0"/>
-                </a:solidFill>
-              </a:rPr>
-              <a:t>RendezVous App  |  Projet de Stage  |  2025-2026</a:t>
-            </a:r>
-          </a:p>
-        </p:txBody>
-      </p:sp>
-      <p:sp>
-        <p:nvSpPr>
-          <p:cNvPr id="10" name="Rectangle 9"/>
-          <p:cNvSpPr/>
-          <p:nvPr/>
-        </p:nvSpPr>
-        <p:spPr>
-          <a:xfrm>
-            <a:off x="274320" y="1463040"/>
-            <a:ext cx="5486400" cy="5074920"/>
-          </a:xfrm>
-          <a:prstGeom prst="rect">
-            <a:avLst/>
-          </a:prstGeom>
-          <a:solidFill>
-            <a:srgbClr val="16213E"/>
-          </a:solidFill>
-          <a:ln>
-            <a:noFill/>
-          </a:ln>
-        </p:spPr>
-        <p:style>
-          <a:lnRef idx="1">
-            <a:schemeClr val="accent1"/>
-          </a:lnRef>
-          <a:fillRef idx="3">
-            <a:schemeClr val="accent1"/>
-          </a:fillRef>
-          <a:effectRef idx="2">
-            <a:schemeClr val="accent1"/>
-          </a:effectRef>
-          <a:fontRef idx="minor">
-            <a:schemeClr val="lt1"/>
-          </a:fontRef>
-        </p:style>
-        <p:txBody>
-          <a:bodyPr rtlCol="0" anchor="ctr"/>
-          <a:lstStyle/>
-          <a:p>
-            <a:pPr algn="ctr"/>
-            <a:endParaRPr/>
-          </a:p>
-        </p:txBody>
-      </p:sp>
-      <p:sp>
-        <p:nvSpPr>
-          <p:cNvPr id="11" name="Rectangle 10"/>
-          <p:cNvSpPr/>
-          <p:nvPr/>
-        </p:nvSpPr>
-        <p:spPr>
-          <a:xfrm>
-            <a:off x="274320" y="1463040"/>
-            <a:ext cx="5486400" cy="73152"/>
-          </a:xfrm>
-          <a:prstGeom prst="rect">
-            <a:avLst/>
-          </a:prstGeom>
-          <a:solidFill>
-            <a:srgbClr val="00E576"/>
-          </a:solidFill>
-          <a:ln>
-            <a:noFill/>
-          </a:ln>
-        </p:spPr>
-        <p:style>
-          <a:lnRef idx="1">
-            <a:schemeClr val="accent1"/>
-          </a:lnRef>
-          <a:fillRef idx="3">
-            <a:schemeClr val="accent1"/>
-          </a:fillRef>
-          <a:effectRef idx="2">
-            <a:schemeClr val="accent1"/>
-          </a:effectRef>
-          <a:fontRef idx="minor">
-            <a:schemeClr val="lt1"/>
-          </a:fontRef>
-        </p:style>
-        <p:txBody>
-          <a:bodyPr rtlCol="0" anchor="ctr"/>
-          <a:lstStyle/>
-          <a:p>
-            <a:pPr algn="ctr"/>
-            <a:endParaRPr/>
-          </a:p>
-        </p:txBody>
-      </p:sp>
-      <p:sp>
-        <p:nvSpPr>
-          <p:cNvPr id="12" name="Rectangle 11"/>
-          <p:cNvSpPr/>
-          <p:nvPr/>
-        </p:nvSpPr>
-        <p:spPr>
-          <a:xfrm>
-            <a:off x="274320" y="1463040"/>
-            <a:ext cx="5486400" cy="594360"/>
-          </a:xfrm>
-          <a:prstGeom prst="rect">
-            <a:avLst/>
-          </a:prstGeom>
-          <a:solidFill>
-            <a:srgbClr val="1A1A2E"/>
-          </a:solidFill>
-          <a:ln>
-            <a:noFill/>
-          </a:ln>
-        </p:spPr>
-        <p:style>
-          <a:lnRef idx="1">
-            <a:schemeClr val="accent1"/>
-          </a:lnRef>
-          <a:fillRef idx="3">
-            <a:schemeClr val="accent1"/>
-          </a:fillRef>
-          <a:effectRef idx="2">
-            <a:schemeClr val="accent1"/>
-          </a:effectRef>
-          <a:fontRef idx="minor">
-            <a:schemeClr val="lt1"/>
-          </a:fontRef>
-        </p:style>
-        <p:txBody>
-          <a:bodyPr rtlCol="0" anchor="ctr"/>
-          <a:lstStyle/>
-          <a:p>
-            <a:pPr algn="ctr"/>
-            <a:endParaRPr/>
-          </a:p>
-        </p:txBody>
-      </p:sp>
-      <p:sp>
-        <p:nvSpPr>
-          <p:cNvPr id="13" name="TextBox 12"/>
-          <p:cNvSpPr txBox="1"/>
-          <p:nvPr/>
-        </p:nvSpPr>
-        <p:spPr>
-          <a:xfrm>
-            <a:off x="411480" y="1536192"/>
-            <a:ext cx="5212080" cy="307777"/>
-          </a:xfrm>
-          <a:prstGeom prst="rect">
-            <a:avLst/>
-          </a:prstGeom>
-          <a:noFill/>
-        </p:spPr>
-        <p:txBody>
-          <a:bodyPr wrap="square">
-            <a:spAutoFit/>
-          </a:bodyPr>
-          <a:lstStyle/>
-          <a:p>
-            <a:pPr algn="l"/>
-            <a:r>
-              <a:rPr sz="1400" b="1" i="0" dirty="0">
-                <a:solidFill>
-                  <a:srgbClr val="00E576"/>
-                </a:solidFill>
-              </a:rPr>
-              <a:t>  Bilan du Stage</a:t>
-            </a:r>
-          </a:p>
-        </p:txBody>
-      </p:sp>
-      <p:sp>
-        <p:nvSpPr>
-          <p:cNvPr id="14" name="TextBox 13"/>
-          <p:cNvSpPr txBox="1"/>
-          <p:nvPr/>
-        </p:nvSpPr>
-        <p:spPr>
-          <a:xfrm>
-            <a:off x="411480" y="2148840"/>
-            <a:ext cx="5212080" cy="4206240"/>
-          </a:xfrm>
-          <a:prstGeom prst="rect">
-            <a:avLst/>
-          </a:prstGeom>
-          <a:noFill/>
-        </p:spPr>
-        <p:txBody>
-          <a:bodyPr wrap="square">
-            <a:spAutoFit/>
-          </a:bodyPr>
-          <a:lstStyle/>
-          <a:p>
-            <a:pPr>
-              <a:spcBef>
-                <a:spcPts val="800"/>
-              </a:spcBef>
-            </a:pPr>
-            <a:r>
-              <a:rPr sz="1250" dirty="0">
-                <a:solidFill>
-                  <a:srgbClr val="E0E0FF"/>
-                </a:solidFill>
-              </a:rPr>
-              <a:t>✔  Application web full-stack </a:t>
-            </a:r>
-            <a:r>
-              <a:rPr sz="1250" dirty="0" err="1">
-                <a:solidFill>
-                  <a:srgbClr val="E0E0FF"/>
-                </a:solidFill>
-              </a:rPr>
-              <a:t>fonctionnelle</a:t>
-            </a:r>
-            <a:r>
-              <a:rPr sz="1250" dirty="0">
-                <a:solidFill>
-                  <a:srgbClr val="E0E0FF"/>
-                </a:solidFill>
-              </a:rPr>
-              <a:t> de A à Z</a:t>
-            </a:r>
-          </a:p>
-          <a:p>
-            <a:pPr>
-              <a:spcBef>
-                <a:spcPts val="800"/>
-              </a:spcBef>
-            </a:pPr>
-            <a:r>
-              <a:rPr sz="1250" dirty="0">
-                <a:solidFill>
-                  <a:srgbClr val="E0E0FF"/>
-                </a:solidFill>
-              </a:rPr>
-              <a:t>✔  Système multi-</a:t>
-            </a:r>
-            <a:r>
-              <a:rPr sz="1250" dirty="0" err="1">
-                <a:solidFill>
-                  <a:srgbClr val="E0E0FF"/>
-                </a:solidFill>
-              </a:rPr>
-              <a:t>rôle</a:t>
-            </a:r>
-            <a:r>
-              <a:rPr sz="1250" dirty="0">
-                <a:solidFill>
-                  <a:srgbClr val="E0E0FF"/>
-                </a:solidFill>
-              </a:rPr>
-              <a:t> </a:t>
-            </a:r>
-            <a:r>
-              <a:rPr sz="1250" dirty="0" err="1">
-                <a:solidFill>
-                  <a:srgbClr val="E0E0FF"/>
-                </a:solidFill>
-              </a:rPr>
-              <a:t>complet</a:t>
-            </a:r>
-            <a:r>
-              <a:rPr sz="1250" dirty="0">
-                <a:solidFill>
-                  <a:srgbClr val="E0E0FF"/>
-                </a:solidFill>
-              </a:rPr>
-              <a:t> et </a:t>
-            </a:r>
-            <a:r>
-              <a:rPr sz="1250" dirty="0" err="1">
-                <a:solidFill>
-                  <a:srgbClr val="E0E0FF"/>
-                </a:solidFill>
-              </a:rPr>
-              <a:t>sécurisé</a:t>
-            </a:r>
-            <a:endParaRPr sz="1250" dirty="0">
-              <a:solidFill>
-                <a:srgbClr val="E0E0FF"/>
-              </a:solidFill>
-            </a:endParaRPr>
-          </a:p>
-          <a:p>
-            <a:pPr>
-              <a:spcBef>
-                <a:spcPts val="800"/>
-              </a:spcBef>
-            </a:pPr>
-            <a:r>
-              <a:rPr sz="1250" dirty="0">
-                <a:solidFill>
-                  <a:srgbClr val="E0E0FF"/>
-                </a:solidFill>
-              </a:rPr>
-              <a:t>✔  API RESTful avec 50+ endpoints </a:t>
-            </a:r>
-            <a:r>
-              <a:rPr sz="1250" dirty="0" err="1">
-                <a:solidFill>
-                  <a:srgbClr val="E0E0FF"/>
-                </a:solidFill>
-              </a:rPr>
-              <a:t>documentés</a:t>
-            </a:r>
-            <a:endParaRPr sz="1250" dirty="0">
-              <a:solidFill>
-                <a:srgbClr val="E0E0FF"/>
-              </a:solidFill>
-            </a:endParaRPr>
-          </a:p>
-          <a:p>
-            <a:pPr>
-              <a:spcBef>
-                <a:spcPts val="800"/>
-              </a:spcBef>
-            </a:pPr>
-            <a:r>
-              <a:rPr sz="1250" dirty="0">
-                <a:solidFill>
-                  <a:srgbClr val="E0E0FF"/>
-                </a:solidFill>
-              </a:rPr>
-              <a:t>✔  Interface React </a:t>
-            </a:r>
-            <a:r>
-              <a:rPr sz="1250" dirty="0" err="1">
-                <a:solidFill>
-                  <a:srgbClr val="E0E0FF"/>
-                </a:solidFill>
-              </a:rPr>
-              <a:t>moderne</a:t>
-            </a:r>
-            <a:r>
-              <a:rPr sz="1250" dirty="0">
-                <a:solidFill>
-                  <a:srgbClr val="E0E0FF"/>
-                </a:solidFill>
-              </a:rPr>
-              <a:t> et </a:t>
-            </a:r>
-            <a:r>
-              <a:rPr sz="1250" dirty="0" err="1">
-                <a:solidFill>
-                  <a:srgbClr val="E0E0FF"/>
-                </a:solidFill>
-              </a:rPr>
-              <a:t>réactive</a:t>
-            </a:r>
-            <a:endParaRPr sz="1250" dirty="0">
-              <a:solidFill>
-                <a:srgbClr val="E0E0FF"/>
-              </a:solidFill>
-            </a:endParaRPr>
-          </a:p>
-          <a:p>
-            <a:pPr>
-              <a:spcBef>
-                <a:spcPts val="800"/>
-              </a:spcBef>
-            </a:pPr>
-            <a:r>
-              <a:rPr sz="1250" dirty="0">
-                <a:solidFill>
-                  <a:srgbClr val="E0E0FF"/>
-                </a:solidFill>
-              </a:rPr>
-              <a:t>✔  </a:t>
-            </a:r>
-            <a:r>
-              <a:rPr sz="1250" dirty="0" err="1">
-                <a:solidFill>
-                  <a:srgbClr val="E0E0FF"/>
-                </a:solidFill>
-              </a:rPr>
-              <a:t>Authentification</a:t>
-            </a:r>
-            <a:r>
-              <a:rPr sz="1250" dirty="0">
-                <a:solidFill>
-                  <a:srgbClr val="E0E0FF"/>
-                </a:solidFill>
-              </a:rPr>
-              <a:t> </a:t>
-            </a:r>
-            <a:r>
-              <a:rPr sz="1250" dirty="0" err="1">
-                <a:solidFill>
-                  <a:srgbClr val="E0E0FF"/>
-                </a:solidFill>
-              </a:rPr>
-              <a:t>robuste</a:t>
-            </a:r>
-            <a:r>
-              <a:rPr sz="1250" dirty="0">
-                <a:solidFill>
-                  <a:srgbClr val="E0E0FF"/>
-                </a:solidFill>
-              </a:rPr>
-              <a:t> (Sanctum + </a:t>
-            </a:r>
-            <a:r>
-              <a:rPr sz="1250" dirty="0" err="1">
-                <a:solidFill>
-                  <a:srgbClr val="E0E0FF"/>
-                </a:solidFill>
-              </a:rPr>
-              <a:t>bcrypt</a:t>
-            </a:r>
-            <a:r>
-              <a:rPr sz="1250" dirty="0">
-                <a:solidFill>
-                  <a:srgbClr val="E0E0FF"/>
-                </a:solidFill>
-              </a:rPr>
-              <a:t>)</a:t>
-            </a:r>
-          </a:p>
-          <a:p>
-            <a:pPr>
-              <a:spcBef>
-                <a:spcPts val="800"/>
-              </a:spcBef>
-            </a:pPr>
-            <a:r>
-              <a:rPr sz="1250" dirty="0">
-                <a:solidFill>
-                  <a:srgbClr val="E0E0FF"/>
-                </a:solidFill>
-              </a:rPr>
-              <a:t>✔  </a:t>
-            </a:r>
-            <a:r>
-              <a:rPr sz="1250" dirty="0" err="1">
-                <a:solidFill>
-                  <a:srgbClr val="E0E0FF"/>
-                </a:solidFill>
-              </a:rPr>
-              <a:t>Calendrier</a:t>
-            </a:r>
-            <a:r>
-              <a:rPr sz="1250" dirty="0">
-                <a:solidFill>
-                  <a:srgbClr val="E0E0FF"/>
-                </a:solidFill>
-              </a:rPr>
-              <a:t> </a:t>
-            </a:r>
-            <a:r>
-              <a:rPr sz="1250" dirty="0" err="1">
-                <a:solidFill>
-                  <a:srgbClr val="E0E0FF"/>
-                </a:solidFill>
-              </a:rPr>
-              <a:t>médical</a:t>
-            </a:r>
-            <a:r>
-              <a:rPr sz="1250" dirty="0">
-                <a:solidFill>
-                  <a:srgbClr val="E0E0FF"/>
-                </a:solidFill>
-              </a:rPr>
-              <a:t> </a:t>
-            </a:r>
-            <a:r>
-              <a:rPr sz="1250" dirty="0" err="1">
-                <a:solidFill>
-                  <a:srgbClr val="E0E0FF"/>
-                </a:solidFill>
-              </a:rPr>
-              <a:t>interactif</a:t>
-            </a:r>
-            <a:r>
-              <a:rPr sz="1250" dirty="0">
-                <a:solidFill>
-                  <a:srgbClr val="E0E0FF"/>
-                </a:solidFill>
-              </a:rPr>
-              <a:t> (</a:t>
-            </a:r>
-            <a:r>
-              <a:rPr sz="1250" dirty="0" err="1">
-                <a:solidFill>
-                  <a:srgbClr val="E0E0FF"/>
-                </a:solidFill>
-              </a:rPr>
-              <a:t>FullCalendar</a:t>
-            </a:r>
-            <a:r>
-              <a:rPr sz="1250" dirty="0">
-                <a:solidFill>
-                  <a:srgbClr val="E0E0FF"/>
-                </a:solidFill>
-              </a:rPr>
-              <a:t>)</a:t>
-            </a:r>
-          </a:p>
-          <a:p>
-            <a:pPr>
-              <a:spcBef>
-                <a:spcPts val="800"/>
-              </a:spcBef>
-            </a:pPr>
-            <a:r>
-              <a:rPr sz="1250" dirty="0">
-                <a:solidFill>
-                  <a:srgbClr val="E0E0FF"/>
-                </a:solidFill>
-              </a:rPr>
-              <a:t>✔  </a:t>
-            </a:r>
-            <a:r>
-              <a:rPr sz="1250" dirty="0" err="1">
-                <a:solidFill>
-                  <a:srgbClr val="E0E0FF"/>
-                </a:solidFill>
-              </a:rPr>
-              <a:t>Maîtrise</a:t>
-            </a:r>
-            <a:r>
-              <a:rPr sz="1250" dirty="0">
-                <a:solidFill>
-                  <a:srgbClr val="E0E0FF"/>
-                </a:solidFill>
-              </a:rPr>
-              <a:t> : React, Redux, Laravel, </a:t>
-            </a:r>
-            <a:r>
-              <a:rPr sz="1250" dirty="0" err="1">
-                <a:solidFill>
-                  <a:srgbClr val="E0E0FF"/>
-                </a:solidFill>
-              </a:rPr>
-              <a:t>TailwindCSS</a:t>
-            </a:r>
-            <a:endParaRPr sz="1250" dirty="0">
-              <a:solidFill>
-                <a:srgbClr val="E0E0FF"/>
-              </a:solidFill>
-            </a:endParaRPr>
-          </a:p>
-          <a:p>
-            <a:pPr>
-              <a:spcBef>
-                <a:spcPts val="800"/>
-              </a:spcBef>
-            </a:pPr>
-            <a:r>
-              <a:rPr sz="1250" dirty="0">
-                <a:solidFill>
-                  <a:srgbClr val="E0E0FF"/>
-                </a:solidFill>
-              </a:rPr>
-              <a:t>✔  Architecture Client-</a:t>
-            </a:r>
-            <a:r>
-              <a:rPr sz="1250" dirty="0" err="1">
-                <a:solidFill>
-                  <a:srgbClr val="E0E0FF"/>
-                </a:solidFill>
-              </a:rPr>
-              <a:t>Serveur</a:t>
-            </a:r>
-            <a:r>
-              <a:rPr sz="1250" dirty="0">
-                <a:solidFill>
-                  <a:srgbClr val="E0E0FF"/>
-                </a:solidFill>
-              </a:rPr>
-              <a:t> </a:t>
-            </a:r>
-            <a:r>
-              <a:rPr sz="1250" dirty="0" err="1">
-                <a:solidFill>
-                  <a:srgbClr val="E0E0FF"/>
-                </a:solidFill>
-              </a:rPr>
-              <a:t>professionnelle</a:t>
-            </a:r>
-            <a:endParaRPr sz="1250" dirty="0">
-              <a:solidFill>
-                <a:srgbClr val="E0E0FF"/>
-              </a:solidFill>
-            </a:endParaRPr>
-          </a:p>
-        </p:txBody>
-      </p:sp>
-      <p:sp>
-        <p:nvSpPr>
-          <p:cNvPr id="15" name="Rectangle 14"/>
-          <p:cNvSpPr/>
-          <p:nvPr/>
-        </p:nvSpPr>
-        <p:spPr>
-          <a:xfrm>
-            <a:off x="6309360" y="1463040"/>
-            <a:ext cx="5577840" cy="5074920"/>
-          </a:xfrm>
-          <a:prstGeom prst="rect">
-            <a:avLst/>
-          </a:prstGeom>
-          <a:solidFill>
-            <a:srgbClr val="16213E"/>
-          </a:solidFill>
-          <a:ln>
-            <a:noFill/>
-          </a:ln>
-        </p:spPr>
-        <p:style>
-          <a:lnRef idx="1">
-            <a:schemeClr val="accent1"/>
-          </a:lnRef>
-          <a:fillRef idx="3">
-            <a:schemeClr val="accent1"/>
-          </a:fillRef>
-          <a:effectRef idx="2">
-            <a:schemeClr val="accent1"/>
-          </a:effectRef>
-          <a:fontRef idx="minor">
-            <a:schemeClr val="lt1"/>
-          </a:fontRef>
-        </p:style>
-        <p:txBody>
-          <a:bodyPr rtlCol="0" anchor="ctr"/>
-          <a:lstStyle/>
-          <a:p>
-            <a:pPr algn="ctr"/>
-            <a:endParaRPr/>
-          </a:p>
-        </p:txBody>
-      </p:sp>
-      <p:sp>
-        <p:nvSpPr>
-          <p:cNvPr id="16" name="Rectangle 15"/>
-          <p:cNvSpPr/>
-          <p:nvPr/>
-        </p:nvSpPr>
-        <p:spPr>
-          <a:xfrm>
-            <a:off x="6309360" y="1463040"/>
-            <a:ext cx="5577840" cy="73152"/>
-          </a:xfrm>
-          <a:prstGeom prst="rect">
-            <a:avLst/>
-          </a:prstGeom>
-          <a:solidFill>
-            <a:srgbClr val="BB86FC"/>
-          </a:solidFill>
-          <a:ln>
-            <a:noFill/>
-          </a:ln>
-        </p:spPr>
-        <p:style>
-          <a:lnRef idx="1">
-            <a:schemeClr val="accent1"/>
-          </a:lnRef>
-          <a:fillRef idx="3">
-            <a:schemeClr val="accent1"/>
-          </a:fillRef>
-          <a:effectRef idx="2">
-            <a:schemeClr val="accent1"/>
-          </a:effectRef>
-          <a:fontRef idx="minor">
-            <a:schemeClr val="lt1"/>
-          </a:fontRef>
-        </p:style>
-        <p:txBody>
-          <a:bodyPr rtlCol="0" anchor="ctr"/>
-          <a:lstStyle/>
-          <a:p>
-            <a:pPr algn="ctr"/>
-            <a:endParaRPr/>
-          </a:p>
-        </p:txBody>
-      </p:sp>
-      <p:sp>
-        <p:nvSpPr>
-          <p:cNvPr id="17" name="Rectangle 16"/>
-          <p:cNvSpPr/>
-          <p:nvPr/>
-        </p:nvSpPr>
-        <p:spPr>
-          <a:xfrm>
-            <a:off x="6309360" y="1463040"/>
-            <a:ext cx="5577840" cy="594360"/>
-          </a:xfrm>
-          <a:prstGeom prst="rect">
-            <a:avLst/>
-          </a:prstGeom>
-          <a:solidFill>
-            <a:srgbClr val="1A1A2E"/>
-          </a:solidFill>
-          <a:ln>
-            <a:noFill/>
-          </a:ln>
-        </p:spPr>
-        <p:style>
-          <a:lnRef idx="1">
-            <a:schemeClr val="accent1"/>
-          </a:lnRef>
-          <a:fillRef idx="3">
-            <a:schemeClr val="accent1"/>
-          </a:fillRef>
-          <a:effectRef idx="2">
-            <a:schemeClr val="accent1"/>
-          </a:effectRef>
-          <a:fontRef idx="minor">
-            <a:schemeClr val="lt1"/>
-          </a:fontRef>
-        </p:style>
-        <p:txBody>
-          <a:bodyPr rtlCol="0" anchor="ctr"/>
-          <a:lstStyle/>
-          <a:p>
-            <a:pPr algn="ctr"/>
-            <a:endParaRPr/>
-          </a:p>
-        </p:txBody>
-      </p:sp>
-      <p:sp>
-        <p:nvSpPr>
-          <p:cNvPr id="18" name="TextBox 17"/>
-          <p:cNvSpPr txBox="1"/>
-          <p:nvPr/>
-        </p:nvSpPr>
-        <p:spPr>
-          <a:xfrm>
-            <a:off x="6446520" y="1536192"/>
-            <a:ext cx="5303520" cy="307777"/>
-          </a:xfrm>
-          <a:prstGeom prst="rect">
-            <a:avLst/>
-          </a:prstGeom>
-          <a:noFill/>
-        </p:spPr>
-        <p:txBody>
-          <a:bodyPr wrap="square">
-            <a:spAutoFit/>
-          </a:bodyPr>
-          <a:lstStyle/>
-          <a:p>
-            <a:pPr algn="l"/>
-            <a:r>
-              <a:rPr lang="en-US" sz="1400" b="1" i="0" dirty="0">
-                <a:solidFill>
-                  <a:srgbClr val="BB86FC"/>
-                </a:solidFill>
-              </a:rPr>
-              <a:t> </a:t>
-            </a:r>
-            <a:r>
-              <a:rPr sz="1400" b="1" i="0" dirty="0">
-                <a:solidFill>
-                  <a:srgbClr val="BB86FC"/>
-                </a:solidFill>
-              </a:rPr>
-              <a:t>Perspectives </a:t>
-            </a:r>
-            <a:r>
-              <a:rPr sz="1400" b="1" i="0" dirty="0" err="1">
-                <a:solidFill>
-                  <a:srgbClr val="BB86FC"/>
-                </a:solidFill>
-              </a:rPr>
-              <a:t>d'Évolution</a:t>
-            </a:r>
-            <a:endParaRPr sz="1400" b="1" i="0" dirty="0">
-              <a:solidFill>
-                <a:srgbClr val="BB86FC"/>
-              </a:solidFill>
-            </a:endParaRPr>
-          </a:p>
-        </p:txBody>
-      </p:sp>
-      <p:sp>
-        <p:nvSpPr>
-          <p:cNvPr id="19" name="TextBox 18"/>
-          <p:cNvSpPr txBox="1"/>
-          <p:nvPr/>
-        </p:nvSpPr>
-        <p:spPr>
-          <a:xfrm>
-            <a:off x="6446520" y="2148840"/>
-            <a:ext cx="5303520" cy="4206240"/>
-          </a:xfrm>
-          <a:prstGeom prst="rect">
-            <a:avLst/>
-          </a:prstGeom>
-          <a:noFill/>
-        </p:spPr>
-        <p:txBody>
-          <a:bodyPr wrap="square">
-            <a:spAutoFit/>
-          </a:bodyPr>
-          <a:lstStyle/>
-          <a:p>
-            <a:pPr>
-              <a:spcBef>
-                <a:spcPts val="800"/>
-              </a:spcBef>
-            </a:pPr>
-            <a:r>
-              <a:rPr sz="1250">
-                <a:solidFill>
-                  <a:srgbClr val="E0E0FF"/>
-                </a:solidFill>
-              </a:rPr>
-              <a:t>→  Notifications email / SMS automatiques</a:t>
-            </a:r>
-          </a:p>
-          <a:p>
-            <a:pPr>
-              <a:spcBef>
-                <a:spcPts val="800"/>
-              </a:spcBef>
-            </a:pPr>
-            <a:r>
-              <a:rPr sz="1250">
-                <a:solidFill>
-                  <a:srgbClr val="E0E0FF"/>
-                </a:solidFill>
-              </a:rPr>
-              <a:t>→  Application mobile (React Native / Flutter)</a:t>
-            </a:r>
-          </a:p>
-          <a:p>
-            <a:pPr>
-              <a:spcBef>
-                <a:spcPts val="800"/>
-              </a:spcBef>
-            </a:pPr>
-            <a:r>
-              <a:rPr sz="1250">
-                <a:solidFill>
-                  <a:srgbClr val="E0E0FF"/>
-                </a:solidFill>
-              </a:rPr>
-              <a:t>→  Paiement en ligne des consultations</a:t>
-            </a:r>
-          </a:p>
-          <a:p>
-            <a:pPr>
-              <a:spcBef>
-                <a:spcPts val="800"/>
-              </a:spcBef>
-            </a:pPr>
-            <a:r>
-              <a:rPr sz="1250">
-                <a:solidFill>
-                  <a:srgbClr val="E0E0FF"/>
-                </a:solidFill>
-              </a:rPr>
-              <a:t>→  Dossier médical patient numérique</a:t>
-            </a:r>
-          </a:p>
-          <a:p>
-            <a:pPr>
-              <a:spcBef>
-                <a:spcPts val="800"/>
-              </a:spcBef>
-            </a:pPr>
-            <a:r>
-              <a:rPr sz="1250">
-                <a:solidFill>
-                  <a:srgbClr val="E0E0FF"/>
-                </a:solidFill>
-              </a:rPr>
-              <a:t>→  Tableau de bord analytique &amp; statistiques</a:t>
-            </a:r>
-          </a:p>
-          <a:p>
-            <a:pPr>
-              <a:spcBef>
-                <a:spcPts val="800"/>
-              </a:spcBef>
-            </a:pPr>
-            <a:r>
-              <a:rPr sz="1250">
-                <a:solidFill>
-                  <a:srgbClr val="E0E0FF"/>
-                </a:solidFill>
-              </a:rPr>
-              <a:t>→  Géolocalisation des cabinets médicaux</a:t>
-            </a:r>
-          </a:p>
-          <a:p>
-            <a:pPr>
-              <a:spcBef>
-                <a:spcPts val="800"/>
-              </a:spcBef>
-            </a:pPr>
-            <a:r>
-              <a:rPr sz="1250">
-                <a:solidFill>
-                  <a:srgbClr val="E0E0FF"/>
-                </a:solidFill>
-              </a:rPr>
-              <a:t>→  Intégration systèmes hospitaliers (HL7)</a:t>
-            </a:r>
-          </a:p>
-          <a:p>
-            <a:pPr>
-              <a:spcBef>
-                <a:spcPts val="800"/>
-              </a:spcBef>
-            </a:pPr>
-            <a:r>
-              <a:rPr sz="1250">
-                <a:solidFill>
-                  <a:srgbClr val="E0E0FF"/>
-                </a:solidFill>
-              </a:rPr>
-              <a:t>→  Déploiement cloud (AWS / VPS)</a:t>
-            </a:r>
-          </a:p>
-        </p:txBody>
-      </p:sp>
-    </p:spTree>
-  </p:cSld>
-  <p:clrMapOvr>
-    <a:masterClrMapping/>
-  </p:clrMapOvr>
-</p:sld>
-</file>
-
-<file path=ppt/slides/slide14.xml><?xml version="1.0" encoding="utf-8"?>
-<p:sld xmlns:a="http://schemas.openxmlformats.org/drawingml/2006/main" xmlns:r="http://schemas.openxmlformats.org/officeDocument/2006/relationships" xmlns:p="http://schemas.openxmlformats.org/presentationml/2006/main">
-  <p:cSld>
-    <p:spTree>
-      <p:nvGrpSpPr>
-        <p:cNvPr id="1" name=""/>
-        <p:cNvGrpSpPr/>
-        <p:nvPr/>
-      </p:nvGrpSpPr>
-      <p:grpSpPr>
-        <a:xfrm>
-          <a:off x="0" y="0"/>
-          <a:ext cx="0" cy="0"/>
-          <a:chOff x="0" y="0"/>
-          <a:chExt cx="0" cy="0"/>
-        </a:xfrm>
-      </p:grpSpPr>
-      <p:sp>
-        <p:nvSpPr>
-          <p:cNvPr id="2" name="Rectangle 1"/>
-          <p:cNvSpPr/>
-          <p:nvPr/>
-        </p:nvSpPr>
-        <p:spPr>
-          <a:xfrm>
-            <a:off x="0" y="0"/>
-            <a:ext cx="12188952" cy="6858000"/>
-          </a:xfrm>
-          <a:prstGeom prst="rect">
-            <a:avLst/>
-          </a:prstGeom>
-          <a:solidFill>
-            <a:srgbClr val="0F0F1A"/>
-          </a:solidFill>
-          <a:ln>
-            <a:noFill/>
-          </a:ln>
-        </p:spPr>
-        <p:style>
-          <a:lnRef idx="1">
-            <a:schemeClr val="accent1"/>
-          </a:lnRef>
-          <a:fillRef idx="3">
-            <a:schemeClr val="accent1"/>
-          </a:fillRef>
-          <a:effectRef idx="2">
-            <a:schemeClr val="accent1"/>
-          </a:effectRef>
-          <a:fontRef idx="minor">
-            <a:schemeClr val="lt1"/>
-          </a:fontRef>
-        </p:style>
-        <p:txBody>
-          <a:bodyPr rtlCol="0" anchor="ctr"/>
-          <a:lstStyle/>
-          <a:p>
-            <a:pPr algn="ctr"/>
-            <a:endParaRPr/>
-          </a:p>
-        </p:txBody>
-      </p:sp>
-      <p:sp>
-        <p:nvSpPr>
-          <p:cNvPr id="3" name="Rectangle 2"/>
-          <p:cNvSpPr/>
-          <p:nvPr/>
-        </p:nvSpPr>
-        <p:spPr>
-          <a:xfrm>
             <a:off x="254000" y="0"/>
             <a:ext cx="12188952" cy="6858000"/>
           </a:xfrm>
@@ -20888,14 +19101,14 @@
       </p:sp>
       <p:sp>
         <p:nvSpPr>
-          <p:cNvPr id="12" name="TextBox 11"/>
+          <p:cNvPr id="13" name="TextBox 12"/>
           <p:cNvSpPr txBox="1"/>
           <p:nvPr/>
         </p:nvSpPr>
         <p:spPr>
           <a:xfrm>
-            <a:off x="438912" y="1572768"/>
-            <a:ext cx="594360" cy="548640"/>
+            <a:off x="1097280" y="1554480"/>
+            <a:ext cx="4754880" cy="411480"/>
           </a:xfrm>
           <a:prstGeom prst="rect">
             <a:avLst/>
@@ -20910,26 +19123,26 @@
           <a:p>
             <a:pPr algn="l"/>
             <a:r>
-              <a:rPr sz="2400" b="0" i="0">
+              <a:rPr sz="1400" b="1" i="0">
                 <a:solidFill>
                   <a:srgbClr val="9B59B6"/>
                 </a:solidFill>
               </a:rPr>
-              <a:t>🔐</a:t>
-            </a:r>
-          </a:p>
-        </p:txBody>
-      </p:sp>
-      <p:sp>
-        <p:nvSpPr>
-          <p:cNvPr id="13" name="TextBox 12"/>
+              <a:t>Auth Multi-Rôle</a:t>
+            </a:r>
+          </a:p>
+        </p:txBody>
+      </p:sp>
+      <p:sp>
+        <p:nvSpPr>
+          <p:cNvPr id="14" name="TextBox 13"/>
           <p:cNvSpPr txBox="1"/>
           <p:nvPr/>
         </p:nvSpPr>
         <p:spPr>
           <a:xfrm>
-            <a:off x="1097280" y="1554480"/>
-            <a:ext cx="4754880" cy="411480"/>
+            <a:off x="1097280" y="1984248"/>
+            <a:ext cx="4754880" cy="868680"/>
           </a:xfrm>
           <a:prstGeom prst="rect">
             <a:avLst/>
@@ -20944,26 +19157,114 @@
           <a:p>
             <a:pPr algn="l"/>
             <a:r>
-              <a:rPr sz="1400" b="1" i="0">
-                <a:solidFill>
-                  <a:srgbClr val="9B59B6"/>
-                </a:solidFill>
-              </a:rPr>
-              <a:t>Auth Multi-Rôle</a:t>
-            </a:r>
-          </a:p>
-        </p:txBody>
-      </p:sp>
-      <p:sp>
-        <p:nvSpPr>
-          <p:cNvPr id="14" name="TextBox 13"/>
+              <a:rPr sz="1150" b="0" i="0">
+                <a:solidFill>
+                  <a:srgbClr val="E0E0FF"/>
+                </a:solidFill>
+              </a:rPr>
+              <a:t>Inscription / connexion sécurisée. Trois rôles distincts avec accès séparés. Token Sanctum + localStorage.</a:t>
+            </a:r>
+          </a:p>
+        </p:txBody>
+      </p:sp>
+      <p:sp>
+        <p:nvSpPr>
+          <p:cNvPr id="15" name="Rectangle 14"/>
+          <p:cNvSpPr/>
+          <p:nvPr/>
+        </p:nvSpPr>
+        <p:spPr>
+          <a:xfrm>
+            <a:off x="6263640" y="1463040"/>
+            <a:ext cx="5715000" cy="1508760"/>
+          </a:xfrm>
+          <a:prstGeom prst="rect">
+            <a:avLst/>
+          </a:prstGeom>
+          <a:solidFill>
+            <a:srgbClr val="16213E"/>
+          </a:solidFill>
+          <a:ln>
+            <a:noFill/>
+          </a:ln>
+        </p:spPr>
+        <p:style>
+          <a:lnRef idx="1">
+            <a:schemeClr val="accent1"/>
+          </a:lnRef>
+          <a:fillRef idx="3">
+            <a:schemeClr val="accent1"/>
+          </a:fillRef>
+          <a:effectRef idx="2">
+            <a:schemeClr val="accent1"/>
+          </a:effectRef>
+          <a:fontRef idx="minor">
+            <a:schemeClr val="lt1"/>
+          </a:fontRef>
+        </p:style>
+        <p:txBody>
+          <a:bodyPr rtlCol="0" anchor="ctr"/>
+          <a:lstStyle/>
+          <a:p>
+            <a:pPr algn="ctr"/>
+            <a:endParaRPr/>
+          </a:p>
+        </p:txBody>
+      </p:sp>
+      <p:sp>
+        <p:nvSpPr>
+          <p:cNvPr id="16" name="Rectangle 15"/>
+          <p:cNvSpPr/>
+          <p:nvPr/>
+        </p:nvSpPr>
+        <p:spPr>
+          <a:xfrm>
+            <a:off x="6263640" y="1463040"/>
+            <a:ext cx="73152" cy="1508760"/>
+          </a:xfrm>
+          <a:prstGeom prst="rect">
+            <a:avLst/>
+          </a:prstGeom>
+          <a:solidFill>
+            <a:srgbClr val="00D2BF"/>
+          </a:solidFill>
+          <a:ln>
+            <a:noFill/>
+          </a:ln>
+        </p:spPr>
+        <p:style>
+          <a:lnRef idx="1">
+            <a:schemeClr val="accent1"/>
+          </a:lnRef>
+          <a:fillRef idx="3">
+            <a:schemeClr val="accent1"/>
+          </a:fillRef>
+          <a:effectRef idx="2">
+            <a:schemeClr val="accent1"/>
+          </a:effectRef>
+          <a:fontRef idx="minor">
+            <a:schemeClr val="lt1"/>
+          </a:fontRef>
+        </p:style>
+        <p:txBody>
+          <a:bodyPr rtlCol="0" anchor="ctr"/>
+          <a:lstStyle/>
+          <a:p>
+            <a:pPr algn="ctr"/>
+            <a:endParaRPr/>
+          </a:p>
+        </p:txBody>
+      </p:sp>
+      <p:sp>
+        <p:nvSpPr>
+          <p:cNvPr id="18" name="TextBox 17"/>
           <p:cNvSpPr txBox="1"/>
           <p:nvPr/>
         </p:nvSpPr>
         <p:spPr>
           <a:xfrm>
-            <a:off x="1097280" y="1984248"/>
-            <a:ext cx="4754880" cy="868680"/>
+            <a:off x="7086600" y="1554480"/>
+            <a:ext cx="4754880" cy="411480"/>
           </a:xfrm>
           <a:prstGeom prst="rect">
             <a:avLst/>
@@ -20978,114 +19279,26 @@
           <a:p>
             <a:pPr algn="l"/>
             <a:r>
-              <a:rPr sz="1150" b="0" i="0">
-                <a:solidFill>
-                  <a:srgbClr val="E0E0FF"/>
-                </a:solidFill>
-              </a:rPr>
-              <a:t>Inscription / connexion sécurisée. Trois rôles distincts avec accès séparés. Token Sanctum + localStorage.</a:t>
-            </a:r>
-          </a:p>
-        </p:txBody>
-      </p:sp>
-      <p:sp>
-        <p:nvSpPr>
-          <p:cNvPr id="15" name="Rectangle 14"/>
-          <p:cNvSpPr/>
-          <p:nvPr/>
-        </p:nvSpPr>
-        <p:spPr>
-          <a:xfrm>
-            <a:off x="6263640" y="1463040"/>
-            <a:ext cx="5715000" cy="1508760"/>
-          </a:xfrm>
-          <a:prstGeom prst="rect">
-            <a:avLst/>
-          </a:prstGeom>
-          <a:solidFill>
-            <a:srgbClr val="16213E"/>
-          </a:solidFill>
-          <a:ln>
-            <a:noFill/>
-          </a:ln>
-        </p:spPr>
-        <p:style>
-          <a:lnRef idx="1">
-            <a:schemeClr val="accent1"/>
-          </a:lnRef>
-          <a:fillRef idx="3">
-            <a:schemeClr val="accent1"/>
-          </a:fillRef>
-          <a:effectRef idx="2">
-            <a:schemeClr val="accent1"/>
-          </a:effectRef>
-          <a:fontRef idx="minor">
-            <a:schemeClr val="lt1"/>
-          </a:fontRef>
-        </p:style>
-        <p:txBody>
-          <a:bodyPr rtlCol="0" anchor="ctr"/>
-          <a:lstStyle/>
-          <a:p>
-            <a:pPr algn="ctr"/>
-            <a:endParaRPr/>
-          </a:p>
-        </p:txBody>
-      </p:sp>
-      <p:sp>
-        <p:nvSpPr>
-          <p:cNvPr id="16" name="Rectangle 15"/>
-          <p:cNvSpPr/>
-          <p:nvPr/>
-        </p:nvSpPr>
-        <p:spPr>
-          <a:xfrm>
-            <a:off x="6263640" y="1463040"/>
-            <a:ext cx="73152" cy="1508760"/>
-          </a:xfrm>
-          <a:prstGeom prst="rect">
-            <a:avLst/>
-          </a:prstGeom>
-          <a:solidFill>
-            <a:srgbClr val="00D2BF"/>
-          </a:solidFill>
-          <a:ln>
-            <a:noFill/>
-          </a:ln>
-        </p:spPr>
-        <p:style>
-          <a:lnRef idx="1">
-            <a:schemeClr val="accent1"/>
-          </a:lnRef>
-          <a:fillRef idx="3">
-            <a:schemeClr val="accent1"/>
-          </a:fillRef>
-          <a:effectRef idx="2">
-            <a:schemeClr val="accent1"/>
-          </a:effectRef>
-          <a:fontRef idx="minor">
-            <a:schemeClr val="lt1"/>
-          </a:fontRef>
-        </p:style>
-        <p:txBody>
-          <a:bodyPr rtlCol="0" anchor="ctr"/>
-          <a:lstStyle/>
-          <a:p>
-            <a:pPr algn="ctr"/>
-            <a:endParaRPr/>
-          </a:p>
-        </p:txBody>
-      </p:sp>
-      <p:sp>
-        <p:nvSpPr>
-          <p:cNvPr id="17" name="TextBox 16"/>
+              <a:rPr sz="1400" b="1" i="0">
+                <a:solidFill>
+                  <a:srgbClr val="00D2BF"/>
+                </a:solidFill>
+              </a:rPr>
+              <a:t>Prise de RDV</a:t>
+            </a:r>
+          </a:p>
+        </p:txBody>
+      </p:sp>
+      <p:sp>
+        <p:nvSpPr>
+          <p:cNvPr id="19" name="TextBox 18"/>
           <p:cNvSpPr txBox="1"/>
           <p:nvPr/>
         </p:nvSpPr>
         <p:spPr>
           <a:xfrm>
-            <a:off x="6428231" y="1572768"/>
-            <a:ext cx="594360" cy="548640"/>
+            <a:off x="7086600" y="1984248"/>
+            <a:ext cx="4754880" cy="868680"/>
           </a:xfrm>
           <a:prstGeom prst="rect">
             <a:avLst/>
@@ -21100,25 +19313,113 @@
           <a:p>
             <a:pPr algn="l"/>
             <a:r>
-              <a:rPr sz="2400" b="0" i="0">
-                <a:solidFill>
-                  <a:srgbClr val="00D2BF"/>
-                </a:solidFill>
-              </a:rPr>
-              <a:t>📅</a:t>
-            </a:r>
-          </a:p>
-        </p:txBody>
-      </p:sp>
-      <p:sp>
-        <p:nvSpPr>
-          <p:cNvPr id="18" name="TextBox 17"/>
+              <a:rPr sz="1150" b="0" i="0">
+                <a:solidFill>
+                  <a:srgbClr val="E0E0FF"/>
+                </a:solidFill>
+              </a:rPr>
+              <a:t>Le patient sélectionne médecin, service et créneau. RDV créé avec statut 'en attente' automatiquement.</a:t>
+            </a:r>
+          </a:p>
+        </p:txBody>
+      </p:sp>
+      <p:sp>
+        <p:nvSpPr>
+          <p:cNvPr id="20" name="Rectangle 19"/>
+          <p:cNvSpPr/>
+          <p:nvPr/>
+        </p:nvSpPr>
+        <p:spPr>
+          <a:xfrm>
+            <a:off x="274320" y="3127248"/>
+            <a:ext cx="5715000" cy="1508760"/>
+          </a:xfrm>
+          <a:prstGeom prst="rect">
+            <a:avLst/>
+          </a:prstGeom>
+          <a:solidFill>
+            <a:srgbClr val="16213E"/>
+          </a:solidFill>
+          <a:ln>
+            <a:noFill/>
+          </a:ln>
+        </p:spPr>
+        <p:style>
+          <a:lnRef idx="1">
+            <a:schemeClr val="accent1"/>
+          </a:lnRef>
+          <a:fillRef idx="3">
+            <a:schemeClr val="accent1"/>
+          </a:fillRef>
+          <a:effectRef idx="2">
+            <a:schemeClr val="accent1"/>
+          </a:effectRef>
+          <a:fontRef idx="minor">
+            <a:schemeClr val="lt1"/>
+          </a:fontRef>
+        </p:style>
+        <p:txBody>
+          <a:bodyPr rtlCol="0" anchor="ctr"/>
+          <a:lstStyle/>
+          <a:p>
+            <a:pPr algn="ctr"/>
+            <a:endParaRPr/>
+          </a:p>
+        </p:txBody>
+      </p:sp>
+      <p:sp>
+        <p:nvSpPr>
+          <p:cNvPr id="21" name="Rectangle 20"/>
+          <p:cNvSpPr/>
+          <p:nvPr/>
+        </p:nvSpPr>
+        <p:spPr>
+          <a:xfrm>
+            <a:off x="274320" y="3127248"/>
+            <a:ext cx="73152" cy="1508760"/>
+          </a:xfrm>
+          <a:prstGeom prst="rect">
+            <a:avLst/>
+          </a:prstGeom>
+          <a:solidFill>
+            <a:srgbClr val="F3C623"/>
+          </a:solidFill>
+          <a:ln>
+            <a:noFill/>
+          </a:ln>
+        </p:spPr>
+        <p:style>
+          <a:lnRef idx="1">
+            <a:schemeClr val="accent1"/>
+          </a:lnRef>
+          <a:fillRef idx="3">
+            <a:schemeClr val="accent1"/>
+          </a:fillRef>
+          <a:effectRef idx="2">
+            <a:schemeClr val="accent1"/>
+          </a:effectRef>
+          <a:fontRef idx="minor">
+            <a:schemeClr val="lt1"/>
+          </a:fontRef>
+        </p:style>
+        <p:txBody>
+          <a:bodyPr rtlCol="0" anchor="ctr"/>
+          <a:lstStyle/>
+          <a:p>
+            <a:pPr algn="ctr"/>
+            <a:endParaRPr/>
+          </a:p>
+        </p:txBody>
+      </p:sp>
+      <p:sp>
+        <p:nvSpPr>
+          <p:cNvPr id="23" name="TextBox 22"/>
           <p:cNvSpPr txBox="1"/>
           <p:nvPr/>
         </p:nvSpPr>
         <p:spPr>
           <a:xfrm>
-            <a:off x="7086600" y="1554480"/>
+            <a:off x="1097280" y="3218688"/>
             <a:ext cx="4754880" cy="411480"/>
           </a:xfrm>
           <a:prstGeom prst="rect">
@@ -21136,23 +19437,23 @@
             <a:r>
               <a:rPr sz="1400" b="1" i="0">
                 <a:solidFill>
-                  <a:srgbClr val="00D2BF"/>
-                </a:solidFill>
-              </a:rPr>
-              <a:t>Prise de RDV</a:t>
-            </a:r>
-          </a:p>
-        </p:txBody>
-      </p:sp>
-      <p:sp>
-        <p:nvSpPr>
-          <p:cNvPr id="19" name="TextBox 18"/>
+                  <a:srgbClr val="F3C623"/>
+                </a:solidFill>
+              </a:rPr>
+              <a:t>Gestion Services</a:t>
+            </a:r>
+          </a:p>
+        </p:txBody>
+      </p:sp>
+      <p:sp>
+        <p:nvSpPr>
+          <p:cNvPr id="24" name="TextBox 23"/>
           <p:cNvSpPr txBox="1"/>
           <p:nvPr/>
         </p:nvSpPr>
         <p:spPr>
           <a:xfrm>
-            <a:off x="7086600" y="1984248"/>
+            <a:off x="1097280" y="3648456"/>
             <a:ext cx="4754880" cy="868680"/>
           </a:xfrm>
           <a:prstGeom prst="rect">
@@ -21173,20 +19474,20 @@
                   <a:srgbClr val="E0E0FF"/>
                 </a:solidFill>
               </a:rPr>
-              <a:t>Le patient sélectionne médecin, service et créneau. RDV créé avec statut 'en attente' automatiquement.</a:t>
-            </a:r>
-          </a:p>
-        </p:txBody>
-      </p:sp>
-      <p:sp>
-        <p:nvSpPr>
-          <p:cNvPr id="20" name="Rectangle 19"/>
-          <p:cNvSpPr/>
-          <p:nvPr/>
-        </p:nvSpPr>
-        <p:spPr>
-          <a:xfrm>
-            <a:off x="274320" y="3127248"/>
+              <a:t>Le médecin crée ses services médicaux (nom, durée en min, prix en DH). Suppression dynamique.</a:t>
+            </a:r>
+          </a:p>
+        </p:txBody>
+      </p:sp>
+      <p:sp>
+        <p:nvSpPr>
+          <p:cNvPr id="25" name="Rectangle 24"/>
+          <p:cNvSpPr/>
+          <p:nvPr/>
+        </p:nvSpPr>
+        <p:spPr>
+          <a:xfrm>
+            <a:off x="6263640" y="3127248"/>
             <a:ext cx="5715000" cy="1508760"/>
           </a:xfrm>
           <a:prstGeom prst="rect">
@@ -21224,58 +19525,58 @@
       </p:sp>
       <p:sp>
         <p:nvSpPr>
-          <p:cNvPr id="21" name="Rectangle 20"/>
-          <p:cNvSpPr/>
-          <p:nvPr/>
-        </p:nvSpPr>
-        <p:spPr>
-          <a:xfrm>
-            <a:off x="274320" y="3127248"/>
+          <p:cNvPr id="26" name="Rectangle 25"/>
+          <p:cNvSpPr/>
+          <p:nvPr/>
+        </p:nvSpPr>
+        <p:spPr>
+          <a:xfrm>
+            <a:off x="6263640" y="3127248"/>
             <a:ext cx="73152" cy="1508760"/>
           </a:xfrm>
           <a:prstGeom prst="rect">
             <a:avLst/>
           </a:prstGeom>
           <a:solidFill>
-            <a:srgbClr val="F3C623"/>
-          </a:solidFill>
-          <a:ln>
-            <a:noFill/>
-          </a:ln>
-        </p:spPr>
-        <p:style>
-          <a:lnRef idx="1">
-            <a:schemeClr val="accent1"/>
-          </a:lnRef>
-          <a:fillRef idx="3">
-            <a:schemeClr val="accent1"/>
-          </a:fillRef>
-          <a:effectRef idx="2">
-            <a:schemeClr val="accent1"/>
-          </a:effectRef>
-          <a:fontRef idx="minor">
-            <a:schemeClr val="lt1"/>
-          </a:fontRef>
-        </p:style>
-        <p:txBody>
-          <a:bodyPr rtlCol="0" anchor="ctr"/>
-          <a:lstStyle/>
-          <a:p>
-            <a:pPr algn="ctr"/>
-            <a:endParaRPr/>
-          </a:p>
-        </p:txBody>
-      </p:sp>
-      <p:sp>
-        <p:nvSpPr>
-          <p:cNvPr id="22" name="TextBox 21"/>
+            <a:srgbClr val="00E576"/>
+          </a:solidFill>
+          <a:ln>
+            <a:noFill/>
+          </a:ln>
+        </p:spPr>
+        <p:style>
+          <a:lnRef idx="1">
+            <a:schemeClr val="accent1"/>
+          </a:lnRef>
+          <a:fillRef idx="3">
+            <a:schemeClr val="accent1"/>
+          </a:fillRef>
+          <a:effectRef idx="2">
+            <a:schemeClr val="accent1"/>
+          </a:effectRef>
+          <a:fontRef idx="minor">
+            <a:schemeClr val="lt1"/>
+          </a:fontRef>
+        </p:style>
+        <p:txBody>
+          <a:bodyPr rtlCol="0" anchor="ctr"/>
+          <a:lstStyle/>
+          <a:p>
+            <a:pPr algn="ctr"/>
+            <a:endParaRPr/>
+          </a:p>
+        </p:txBody>
+      </p:sp>
+      <p:sp>
+        <p:nvSpPr>
+          <p:cNvPr id="28" name="TextBox 27"/>
           <p:cNvSpPr txBox="1"/>
           <p:nvPr/>
         </p:nvSpPr>
         <p:spPr>
           <a:xfrm>
-            <a:off x="438912" y="3236976"/>
-            <a:ext cx="594360" cy="548640"/>
+            <a:off x="7086600" y="3218688"/>
+            <a:ext cx="4754880" cy="411480"/>
           </a:xfrm>
           <a:prstGeom prst="rect">
             <a:avLst/>
@@ -21290,26 +19591,26 @@
           <a:p>
             <a:pPr algn="l"/>
             <a:r>
-              <a:rPr sz="2400" b="0" i="0">
-                <a:solidFill>
-                  <a:srgbClr val="F3C623"/>
-                </a:solidFill>
-              </a:rPr>
-              <a:t>⚙️</a:t>
-            </a:r>
-          </a:p>
-        </p:txBody>
-      </p:sp>
-      <p:sp>
-        <p:nvSpPr>
-          <p:cNvPr id="23" name="TextBox 22"/>
+              <a:rPr sz="1400" b="1" i="0">
+                <a:solidFill>
+                  <a:srgbClr val="00E576"/>
+                </a:solidFill>
+              </a:rPr>
+              <a:t>Créneaux Horaires</a:t>
+            </a:r>
+          </a:p>
+        </p:txBody>
+      </p:sp>
+      <p:sp>
+        <p:nvSpPr>
+          <p:cNvPr id="29" name="TextBox 28"/>
           <p:cNvSpPr txBox="1"/>
           <p:nvPr/>
         </p:nvSpPr>
         <p:spPr>
           <a:xfrm>
-            <a:off x="1097280" y="3218688"/>
-            <a:ext cx="4754880" cy="411480"/>
+            <a:off x="7086600" y="3648456"/>
+            <a:ext cx="4754880" cy="868680"/>
           </a:xfrm>
           <a:prstGeom prst="rect">
             <a:avLst/>
@@ -21324,26 +19625,114 @@
           <a:p>
             <a:pPr algn="l"/>
             <a:r>
-              <a:rPr sz="1400" b="1" i="0">
-                <a:solidFill>
-                  <a:srgbClr val="F3C623"/>
-                </a:solidFill>
-              </a:rPr>
-              <a:t>Gestion Services</a:t>
-            </a:r>
-          </a:p>
-        </p:txBody>
-      </p:sp>
-      <p:sp>
-        <p:nvSpPr>
-          <p:cNvPr id="24" name="TextBox 23"/>
+              <a:rPr sz="1150" b="0" i="0">
+                <a:solidFill>
+                  <a:srgbClr val="E0E0FF"/>
+                </a:solidFill>
+              </a:rPr>
+              <a:t>Création de plages disponibles. Marquage automatique 'indisponible' après réservation.</a:t>
+            </a:r>
+          </a:p>
+        </p:txBody>
+      </p:sp>
+      <p:sp>
+        <p:nvSpPr>
+          <p:cNvPr id="30" name="Rectangle 29"/>
+          <p:cNvSpPr/>
+          <p:nvPr/>
+        </p:nvSpPr>
+        <p:spPr>
+          <a:xfrm>
+            <a:off x="274320" y="4791456"/>
+            <a:ext cx="5715000" cy="1508760"/>
+          </a:xfrm>
+          <a:prstGeom prst="rect">
+            <a:avLst/>
+          </a:prstGeom>
+          <a:solidFill>
+            <a:srgbClr val="16213E"/>
+          </a:solidFill>
+          <a:ln>
+            <a:noFill/>
+          </a:ln>
+        </p:spPr>
+        <p:style>
+          <a:lnRef idx="1">
+            <a:schemeClr val="accent1"/>
+          </a:lnRef>
+          <a:fillRef idx="3">
+            <a:schemeClr val="accent1"/>
+          </a:fillRef>
+          <a:effectRef idx="2">
+            <a:schemeClr val="accent1"/>
+          </a:effectRef>
+          <a:fontRef idx="minor">
+            <a:schemeClr val="lt1"/>
+          </a:fontRef>
+        </p:style>
+        <p:txBody>
+          <a:bodyPr rtlCol="0" anchor="ctr"/>
+          <a:lstStyle/>
+          <a:p>
+            <a:pPr algn="ctr"/>
+            <a:endParaRPr/>
+          </a:p>
+        </p:txBody>
+      </p:sp>
+      <p:sp>
+        <p:nvSpPr>
+          <p:cNvPr id="31" name="Rectangle 30"/>
+          <p:cNvSpPr/>
+          <p:nvPr/>
+        </p:nvSpPr>
+        <p:spPr>
+          <a:xfrm>
+            <a:off x="274320" y="4791456"/>
+            <a:ext cx="73152" cy="1508760"/>
+          </a:xfrm>
+          <a:prstGeom prst="rect">
+            <a:avLst/>
+          </a:prstGeom>
+          <a:solidFill>
+            <a:srgbClr val="FF6384"/>
+          </a:solidFill>
+          <a:ln>
+            <a:noFill/>
+          </a:ln>
+        </p:spPr>
+        <p:style>
+          <a:lnRef idx="1">
+            <a:schemeClr val="accent1"/>
+          </a:lnRef>
+          <a:fillRef idx="3">
+            <a:schemeClr val="accent1"/>
+          </a:fillRef>
+          <a:effectRef idx="2">
+            <a:schemeClr val="accent1"/>
+          </a:effectRef>
+          <a:fontRef idx="minor">
+            <a:schemeClr val="lt1"/>
+          </a:fontRef>
+        </p:style>
+        <p:txBody>
+          <a:bodyPr rtlCol="0" anchor="ctr"/>
+          <a:lstStyle/>
+          <a:p>
+            <a:pPr algn="ctr"/>
+            <a:endParaRPr/>
+          </a:p>
+        </p:txBody>
+      </p:sp>
+      <p:sp>
+        <p:nvSpPr>
+          <p:cNvPr id="33" name="TextBox 32"/>
           <p:cNvSpPr txBox="1"/>
           <p:nvPr/>
         </p:nvSpPr>
         <p:spPr>
           <a:xfrm>
-            <a:off x="1097280" y="3648456"/>
-            <a:ext cx="4754880" cy="868680"/>
+            <a:off x="1097280" y="4882896"/>
+            <a:ext cx="4754880" cy="411480"/>
           </a:xfrm>
           <a:prstGeom prst="rect">
             <a:avLst/>
@@ -21358,114 +19747,26 @@
           <a:p>
             <a:pPr algn="l"/>
             <a:r>
-              <a:rPr sz="1150" b="0" i="0">
-                <a:solidFill>
-                  <a:srgbClr val="E0E0FF"/>
-                </a:solidFill>
-              </a:rPr>
-              <a:t>Le médecin crée ses services médicaux (nom, durée en min, prix en DH). Suppression dynamique.</a:t>
-            </a:r>
-          </a:p>
-        </p:txBody>
-      </p:sp>
-      <p:sp>
-        <p:nvSpPr>
-          <p:cNvPr id="25" name="Rectangle 24"/>
-          <p:cNvSpPr/>
-          <p:nvPr/>
-        </p:nvSpPr>
-        <p:spPr>
-          <a:xfrm>
-            <a:off x="6263640" y="3127248"/>
-            <a:ext cx="5715000" cy="1508760"/>
-          </a:xfrm>
-          <a:prstGeom prst="rect">
-            <a:avLst/>
-          </a:prstGeom>
-          <a:solidFill>
-            <a:srgbClr val="16213E"/>
-          </a:solidFill>
-          <a:ln>
-            <a:noFill/>
-          </a:ln>
-        </p:spPr>
-        <p:style>
-          <a:lnRef idx="1">
-            <a:schemeClr val="accent1"/>
-          </a:lnRef>
-          <a:fillRef idx="3">
-            <a:schemeClr val="accent1"/>
-          </a:fillRef>
-          <a:effectRef idx="2">
-            <a:schemeClr val="accent1"/>
-          </a:effectRef>
-          <a:fontRef idx="minor">
-            <a:schemeClr val="lt1"/>
-          </a:fontRef>
-        </p:style>
-        <p:txBody>
-          <a:bodyPr rtlCol="0" anchor="ctr"/>
-          <a:lstStyle/>
-          <a:p>
-            <a:pPr algn="ctr"/>
-            <a:endParaRPr/>
-          </a:p>
-        </p:txBody>
-      </p:sp>
-      <p:sp>
-        <p:nvSpPr>
-          <p:cNvPr id="26" name="Rectangle 25"/>
-          <p:cNvSpPr/>
-          <p:nvPr/>
-        </p:nvSpPr>
-        <p:spPr>
-          <a:xfrm>
-            <a:off x="6263640" y="3127248"/>
-            <a:ext cx="73152" cy="1508760"/>
-          </a:xfrm>
-          <a:prstGeom prst="rect">
-            <a:avLst/>
-          </a:prstGeom>
-          <a:solidFill>
-            <a:srgbClr val="00E576"/>
-          </a:solidFill>
-          <a:ln>
-            <a:noFill/>
-          </a:ln>
-        </p:spPr>
-        <p:style>
-          <a:lnRef idx="1">
-            <a:schemeClr val="accent1"/>
-          </a:lnRef>
-          <a:fillRef idx="3">
-            <a:schemeClr val="accent1"/>
-          </a:fillRef>
-          <a:effectRef idx="2">
-            <a:schemeClr val="accent1"/>
-          </a:effectRef>
-          <a:fontRef idx="minor">
-            <a:schemeClr val="lt1"/>
-          </a:fontRef>
-        </p:style>
-        <p:txBody>
-          <a:bodyPr rtlCol="0" anchor="ctr"/>
-          <a:lstStyle/>
-          <a:p>
-            <a:pPr algn="ctr"/>
-            <a:endParaRPr/>
-          </a:p>
-        </p:txBody>
-      </p:sp>
-      <p:sp>
-        <p:nvSpPr>
-          <p:cNvPr id="27" name="TextBox 26"/>
+              <a:rPr sz="1400" b="1" i="0">
+                <a:solidFill>
+                  <a:srgbClr val="FF6384"/>
+                </a:solidFill>
+              </a:rPr>
+              <a:t>Calendrier Visuel</a:t>
+            </a:r>
+          </a:p>
+        </p:txBody>
+      </p:sp>
+      <p:sp>
+        <p:nvSpPr>
+          <p:cNvPr id="34" name="TextBox 33"/>
           <p:cNvSpPr txBox="1"/>
           <p:nvPr/>
         </p:nvSpPr>
         <p:spPr>
           <a:xfrm>
-            <a:off x="6428231" y="3236976"/>
-            <a:ext cx="594360" cy="548640"/>
+            <a:off x="1097280" y="5312664"/>
+            <a:ext cx="4754880" cy="868680"/>
           </a:xfrm>
           <a:prstGeom prst="rect">
             <a:avLst/>
@@ -21480,264 +19781,6 @@
           <a:p>
             <a:pPr algn="l"/>
             <a:r>
-              <a:rPr sz="2400" b="0" i="0">
-                <a:solidFill>
-                  <a:srgbClr val="00E576"/>
-                </a:solidFill>
-              </a:rPr>
-              <a:t>🗓</a:t>
-            </a:r>
-          </a:p>
-        </p:txBody>
-      </p:sp>
-      <p:sp>
-        <p:nvSpPr>
-          <p:cNvPr id="28" name="TextBox 27"/>
-          <p:cNvSpPr txBox="1"/>
-          <p:nvPr/>
-        </p:nvSpPr>
-        <p:spPr>
-          <a:xfrm>
-            <a:off x="7086600" y="3218688"/>
-            <a:ext cx="4754880" cy="411480"/>
-          </a:xfrm>
-          <a:prstGeom prst="rect">
-            <a:avLst/>
-          </a:prstGeom>
-          <a:noFill/>
-        </p:spPr>
-        <p:txBody>
-          <a:bodyPr wrap="square">
-            <a:spAutoFit/>
-          </a:bodyPr>
-          <a:lstStyle/>
-          <a:p>
-            <a:pPr algn="l"/>
-            <a:r>
-              <a:rPr sz="1400" b="1" i="0">
-                <a:solidFill>
-                  <a:srgbClr val="00E576"/>
-                </a:solidFill>
-              </a:rPr>
-              <a:t>Créneaux Horaires</a:t>
-            </a:r>
-          </a:p>
-        </p:txBody>
-      </p:sp>
-      <p:sp>
-        <p:nvSpPr>
-          <p:cNvPr id="29" name="TextBox 28"/>
-          <p:cNvSpPr txBox="1"/>
-          <p:nvPr/>
-        </p:nvSpPr>
-        <p:spPr>
-          <a:xfrm>
-            <a:off x="7086600" y="3648456"/>
-            <a:ext cx="4754880" cy="868680"/>
-          </a:xfrm>
-          <a:prstGeom prst="rect">
-            <a:avLst/>
-          </a:prstGeom>
-          <a:noFill/>
-        </p:spPr>
-        <p:txBody>
-          <a:bodyPr wrap="square">
-            <a:spAutoFit/>
-          </a:bodyPr>
-          <a:lstStyle/>
-          <a:p>
-            <a:pPr algn="l"/>
-            <a:r>
-              <a:rPr sz="1150" b="0" i="0">
-                <a:solidFill>
-                  <a:srgbClr val="E0E0FF"/>
-                </a:solidFill>
-              </a:rPr>
-              <a:t>Création de plages disponibles. Marquage automatique 'indisponible' après réservation.</a:t>
-            </a:r>
-          </a:p>
-        </p:txBody>
-      </p:sp>
-      <p:sp>
-        <p:nvSpPr>
-          <p:cNvPr id="30" name="Rectangle 29"/>
-          <p:cNvSpPr/>
-          <p:nvPr/>
-        </p:nvSpPr>
-        <p:spPr>
-          <a:xfrm>
-            <a:off x="274320" y="4791456"/>
-            <a:ext cx="5715000" cy="1508760"/>
-          </a:xfrm>
-          <a:prstGeom prst="rect">
-            <a:avLst/>
-          </a:prstGeom>
-          <a:solidFill>
-            <a:srgbClr val="16213E"/>
-          </a:solidFill>
-          <a:ln>
-            <a:noFill/>
-          </a:ln>
-        </p:spPr>
-        <p:style>
-          <a:lnRef idx="1">
-            <a:schemeClr val="accent1"/>
-          </a:lnRef>
-          <a:fillRef idx="3">
-            <a:schemeClr val="accent1"/>
-          </a:fillRef>
-          <a:effectRef idx="2">
-            <a:schemeClr val="accent1"/>
-          </a:effectRef>
-          <a:fontRef idx="minor">
-            <a:schemeClr val="lt1"/>
-          </a:fontRef>
-        </p:style>
-        <p:txBody>
-          <a:bodyPr rtlCol="0" anchor="ctr"/>
-          <a:lstStyle/>
-          <a:p>
-            <a:pPr algn="ctr"/>
-            <a:endParaRPr/>
-          </a:p>
-        </p:txBody>
-      </p:sp>
-      <p:sp>
-        <p:nvSpPr>
-          <p:cNvPr id="31" name="Rectangle 30"/>
-          <p:cNvSpPr/>
-          <p:nvPr/>
-        </p:nvSpPr>
-        <p:spPr>
-          <a:xfrm>
-            <a:off x="274320" y="4791456"/>
-            <a:ext cx="73152" cy="1508760"/>
-          </a:xfrm>
-          <a:prstGeom prst="rect">
-            <a:avLst/>
-          </a:prstGeom>
-          <a:solidFill>
-            <a:srgbClr val="FF6384"/>
-          </a:solidFill>
-          <a:ln>
-            <a:noFill/>
-          </a:ln>
-        </p:spPr>
-        <p:style>
-          <a:lnRef idx="1">
-            <a:schemeClr val="accent1"/>
-          </a:lnRef>
-          <a:fillRef idx="3">
-            <a:schemeClr val="accent1"/>
-          </a:fillRef>
-          <a:effectRef idx="2">
-            <a:schemeClr val="accent1"/>
-          </a:effectRef>
-          <a:fontRef idx="minor">
-            <a:schemeClr val="lt1"/>
-          </a:fontRef>
-        </p:style>
-        <p:txBody>
-          <a:bodyPr rtlCol="0" anchor="ctr"/>
-          <a:lstStyle/>
-          <a:p>
-            <a:pPr algn="ctr"/>
-            <a:endParaRPr/>
-          </a:p>
-        </p:txBody>
-      </p:sp>
-      <p:sp>
-        <p:nvSpPr>
-          <p:cNvPr id="32" name="TextBox 31"/>
-          <p:cNvSpPr txBox="1"/>
-          <p:nvPr/>
-        </p:nvSpPr>
-        <p:spPr>
-          <a:xfrm>
-            <a:off x="438912" y="4901184"/>
-            <a:ext cx="594360" cy="548640"/>
-          </a:xfrm>
-          <a:prstGeom prst="rect">
-            <a:avLst/>
-          </a:prstGeom>
-          <a:noFill/>
-        </p:spPr>
-        <p:txBody>
-          <a:bodyPr wrap="square">
-            <a:spAutoFit/>
-          </a:bodyPr>
-          <a:lstStyle/>
-          <a:p>
-            <a:pPr algn="l"/>
-            <a:r>
-              <a:rPr sz="2400" b="0" i="0">
-                <a:solidFill>
-                  <a:srgbClr val="FF6384"/>
-                </a:solidFill>
-              </a:rPr>
-              <a:t>📊</a:t>
-            </a:r>
-          </a:p>
-        </p:txBody>
-      </p:sp>
-      <p:sp>
-        <p:nvSpPr>
-          <p:cNvPr id="33" name="TextBox 32"/>
-          <p:cNvSpPr txBox="1"/>
-          <p:nvPr/>
-        </p:nvSpPr>
-        <p:spPr>
-          <a:xfrm>
-            <a:off x="1097280" y="4882896"/>
-            <a:ext cx="4754880" cy="411480"/>
-          </a:xfrm>
-          <a:prstGeom prst="rect">
-            <a:avLst/>
-          </a:prstGeom>
-          <a:noFill/>
-        </p:spPr>
-        <p:txBody>
-          <a:bodyPr wrap="square">
-            <a:spAutoFit/>
-          </a:bodyPr>
-          <a:lstStyle/>
-          <a:p>
-            <a:pPr algn="l"/>
-            <a:r>
-              <a:rPr sz="1400" b="1" i="0">
-                <a:solidFill>
-                  <a:srgbClr val="FF6384"/>
-                </a:solidFill>
-              </a:rPr>
-              <a:t>Calendrier Visuel</a:t>
-            </a:r>
-          </a:p>
-        </p:txBody>
-      </p:sp>
-      <p:sp>
-        <p:nvSpPr>
-          <p:cNvPr id="34" name="TextBox 33"/>
-          <p:cNvSpPr txBox="1"/>
-          <p:nvPr/>
-        </p:nvSpPr>
-        <p:spPr>
-          <a:xfrm>
-            <a:off x="1097280" y="5312664"/>
-            <a:ext cx="4754880" cy="868680"/>
-          </a:xfrm>
-          <a:prstGeom prst="rect">
-            <a:avLst/>
-          </a:prstGeom>
-          <a:noFill/>
-        </p:spPr>
-        <p:txBody>
-          <a:bodyPr wrap="square">
-            <a:spAutoFit/>
-          </a:bodyPr>
-          <a:lstStyle/>
-          <a:p>
-            <a:pPr algn="l"/>
-            <a:r>
               <a:rPr sz="1150" b="0" i="0">
                 <a:solidFill>
                   <a:srgbClr val="E0E0FF"/>
@@ -21833,40 +19876,6 @@
           <a:p>
             <a:pPr algn="ctr"/>
             <a:endParaRPr/>
-          </a:p>
-        </p:txBody>
-      </p:sp>
-      <p:sp>
-        <p:nvSpPr>
-          <p:cNvPr id="37" name="TextBox 36"/>
-          <p:cNvSpPr txBox="1"/>
-          <p:nvPr/>
-        </p:nvSpPr>
-        <p:spPr>
-          <a:xfrm>
-            <a:off x="6428231" y="4901184"/>
-            <a:ext cx="594360" cy="548640"/>
-          </a:xfrm>
-          <a:prstGeom prst="rect">
-            <a:avLst/>
-          </a:prstGeom>
-          <a:noFill/>
-        </p:spPr>
-        <p:txBody>
-          <a:bodyPr wrap="square">
-            <a:spAutoFit/>
-          </a:bodyPr>
-          <a:lstStyle/>
-          <a:p>
-            <a:pPr algn="l"/>
-            <a:r>
-              <a:rPr sz="2400" b="0" i="0">
-                <a:solidFill>
-                  <a:srgbClr val="FF8C00"/>
-                </a:solidFill>
-              </a:rPr>
-              <a:t>✅</a:t>
-            </a:r>
           </a:p>
         </p:txBody>
       </p:sp>
@@ -23681,40 +21690,6 @@
                 </a:solidFill>
               </a:rPr>
               <a:t>id · patient_id* · service_id* · creneau_id* · date · heure · status</a:t>
-            </a:r>
-          </a:p>
-        </p:txBody>
-      </p:sp>
-      <p:sp>
-        <p:nvSpPr>
-          <p:cNvPr id="45" name="TextBox 44"/>
-          <p:cNvSpPr txBox="1"/>
-          <p:nvPr/>
-        </p:nvSpPr>
-        <p:spPr>
-          <a:xfrm>
-            <a:off x="274320" y="6016752"/>
-            <a:ext cx="11612880" cy="274320"/>
-          </a:xfrm>
-          <a:prstGeom prst="rect">
-            <a:avLst/>
-          </a:prstGeom>
-          <a:noFill/>
-        </p:spPr>
-        <p:txBody>
-          <a:bodyPr wrap="square">
-            <a:spAutoFit/>
-          </a:bodyPr>
-          <a:lstStyle/>
-          <a:p>
-            <a:pPr algn="ctr"/>
-            <a:r>
-              <a:rPr sz="1000" b="0" i="0">
-                <a:solidFill>
-                  <a:srgbClr val="A0A0C0"/>
-                </a:solidFill>
-              </a:rPr>
-              <a:t>* = Clé Étrangère (FK)   ·   Toutes les tables : created_at / updated_at</a:t>
             </a:r>
           </a:p>
         </p:txBody>
